--- a/docs/mimic-feasibility-analysis.pptx
+++ b/docs/mimic-feasibility-analysis.pptx
@@ -5,7 +5,7 @@
     <p:sldMasterId id="2147483648" r:id="rId1"/>
   </p:sldMasterIdLst>
   <p:notesMasterIdLst>
-    <p:notesMasterId r:id="rId26"/>
+    <p:notesMasterId r:id="rId27"/>
   </p:notesMasterIdLst>
   <p:sldIdLst>
     <p:sldId id="256" r:id="rId2"/>
@@ -22,16 +22,17 @@
     <p:sldId id="280" r:id="rId13"/>
     <p:sldId id="265" r:id="rId14"/>
     <p:sldId id="284" r:id="rId15"/>
-    <p:sldId id="268" r:id="rId16"/>
-    <p:sldId id="277" r:id="rId17"/>
-    <p:sldId id="264" r:id="rId18"/>
-    <p:sldId id="286" r:id="rId19"/>
-    <p:sldId id="281" r:id="rId20"/>
-    <p:sldId id="270" r:id="rId21"/>
-    <p:sldId id="283" r:id="rId22"/>
-    <p:sldId id="271" r:id="rId23"/>
-    <p:sldId id="269" r:id="rId24"/>
-    <p:sldId id="288" r:id="rId25"/>
+    <p:sldId id="291" r:id="rId16"/>
+    <p:sldId id="268" r:id="rId17"/>
+    <p:sldId id="277" r:id="rId18"/>
+    <p:sldId id="264" r:id="rId19"/>
+    <p:sldId id="286" r:id="rId20"/>
+    <p:sldId id="281" r:id="rId21"/>
+    <p:sldId id="270" r:id="rId22"/>
+    <p:sldId id="283" r:id="rId23"/>
+    <p:sldId id="271" r:id="rId24"/>
+    <p:sldId id="269" r:id="rId25"/>
+    <p:sldId id="288" r:id="rId26"/>
   </p:sldIdLst>
   <p:sldSz cx="12192000" cy="6858000"/>
   <p:notesSz cx="6858000" cy="9144000"/>
@@ -231,7 +232,7 @@
           <a:p>
             <a:fld id="{1095136B-D240-4AC1-860D-A53BD70B9DD0}" type="datetimeFigureOut">
               <a:rPr lang="LID4096" smtClean="0"/>
-              <a:t>03/30/2026</a:t>
+              <a:t>04/15/2026</a:t>
             </a:fld>
             <a:endParaRPr lang="LID4096"/>
           </a:p>
@@ -678,7 +679,7 @@
           <a:p>
             <a:fld id="{7946C467-44DF-404A-AD8D-BD7FC61F89E0}" type="datetime1">
               <a:rPr lang="en-US" smtClean="0"/>
-              <a:t>3/30/2026</a:t>
+              <a:t>4/15/2026</a:t>
             </a:fld>
             <a:endParaRPr lang="en-US"/>
           </a:p>
@@ -846,7 +847,7 @@
           <a:p>
             <a:fld id="{F7DE8645-AF42-4890-A560-4B70522C4AFC}" type="datetime1">
               <a:rPr lang="en-US" smtClean="0"/>
-              <a:t>3/30/2026</a:t>
+              <a:t>4/15/2026</a:t>
             </a:fld>
             <a:endParaRPr lang="en-US"/>
           </a:p>
@@ -1024,7 +1025,7 @@
           <a:p>
             <a:fld id="{F2A694C5-6E2F-4E41-B8EF-647314903EED}" type="datetime1">
               <a:rPr lang="en-US" smtClean="0"/>
-              <a:t>3/30/2026</a:t>
+              <a:t>4/15/2026</a:t>
             </a:fld>
             <a:endParaRPr lang="en-US"/>
           </a:p>
@@ -1192,7 +1193,7 @@
           <a:p>
             <a:fld id="{3DF8CFE6-D184-487A-ACD8-A82DCF433FE4}" type="datetime1">
               <a:rPr lang="en-US" smtClean="0"/>
-              <a:t>3/30/2026</a:t>
+              <a:t>4/15/2026</a:t>
             </a:fld>
             <a:endParaRPr lang="en-US"/>
           </a:p>
@@ -1437,7 +1438,7 @@
           <a:p>
             <a:fld id="{DCCF5D13-F6BB-4CFE-9D3A-C12C7FF7146A}" type="datetime1">
               <a:rPr lang="en-US" smtClean="0"/>
-              <a:t>3/30/2026</a:t>
+              <a:t>4/15/2026</a:t>
             </a:fld>
             <a:endParaRPr lang="en-US"/>
           </a:p>
@@ -1722,7 +1723,7 @@
           <a:p>
             <a:fld id="{80C06912-22D9-4F6C-B8D3-B4D2C75C002C}" type="datetime1">
               <a:rPr lang="en-US" smtClean="0"/>
-              <a:t>3/30/2026</a:t>
+              <a:t>4/15/2026</a:t>
             </a:fld>
             <a:endParaRPr lang="en-US"/>
           </a:p>
@@ -2141,7 +2142,7 @@
           <a:p>
             <a:fld id="{9A0D3F3C-ACFC-4546-A995-7A6F4D5F2C2F}" type="datetime1">
               <a:rPr lang="en-US" smtClean="0"/>
-              <a:t>3/30/2026</a:t>
+              <a:t>4/15/2026</a:t>
             </a:fld>
             <a:endParaRPr lang="en-US"/>
           </a:p>
@@ -2258,7 +2259,7 @@
           <a:p>
             <a:fld id="{350F4C59-E9D1-4841-8245-1515E61AFD97}" type="datetime1">
               <a:rPr lang="en-US" smtClean="0"/>
-              <a:t>3/30/2026</a:t>
+              <a:t>4/15/2026</a:t>
             </a:fld>
             <a:endParaRPr lang="en-US"/>
           </a:p>
@@ -2353,7 +2354,7 @@
           <a:p>
             <a:fld id="{20FE2A83-F9D6-485C-B62C-7D807D9F4EEC}" type="datetime1">
               <a:rPr lang="en-US" smtClean="0"/>
-              <a:t>3/30/2026</a:t>
+              <a:t>4/15/2026</a:t>
             </a:fld>
             <a:endParaRPr lang="en-US"/>
           </a:p>
@@ -2633,7 +2634,7 @@
           <a:p>
             <a:fld id="{65A34C42-C467-4317-9AB6-F6377EDB2B46}" type="datetime1">
               <a:rPr lang="en-US" smtClean="0"/>
-              <a:t>3/30/2026</a:t>
+              <a:t>4/15/2026</a:t>
             </a:fld>
             <a:endParaRPr lang="en-US"/>
           </a:p>
@@ -2885,7 +2886,7 @@
           <a:p>
             <a:fld id="{7CCA7F95-4EC6-49DA-B964-0DFF9C20A579}" type="datetime1">
               <a:rPr lang="en-US" smtClean="0"/>
-              <a:t>3/30/2026</a:t>
+              <a:t>4/15/2026</a:t>
             </a:fld>
             <a:endParaRPr lang="en-US"/>
           </a:p>
@@ -3096,7 +3097,7 @@
           <a:p>
             <a:fld id="{9A8C62E3-A9B5-4551-83D8-3C193A9C17DB}" type="datetime1">
               <a:rPr lang="en-US" smtClean="0"/>
-              <a:t>3/30/2026</a:t>
+              <a:t>4/15/2026</a:t>
             </a:fld>
             <a:endParaRPr lang="en-US"/>
           </a:p>
@@ -7248,6 +7249,619 @@
 <file path=ppt/slides/slide15.xml><?xml version="1.0" encoding="utf-8"?>
 <p:sld xmlns:a="http://schemas.openxmlformats.org/drawingml/2006/main" xmlns:r="http://schemas.openxmlformats.org/officeDocument/2006/relationships" xmlns:p="http://schemas.openxmlformats.org/presentationml/2006/main">
   <p:cSld>
+    <p:spTree>
+      <p:nvGrpSpPr>
+        <p:cNvPr id="1" name="">
+          <a:extLst>
+            <a:ext uri="{FF2B5EF4-FFF2-40B4-BE49-F238E27FC236}">
+              <a16:creationId xmlns:a16="http://schemas.microsoft.com/office/drawing/2014/main" id="{18F56F52-25A1-873A-EF4D-F8284BCB6913}"/>
+            </a:ext>
+          </a:extLst>
+        </p:cNvPr>
+        <p:cNvGrpSpPr/>
+        <p:nvPr/>
+      </p:nvGrpSpPr>
+      <p:grpSpPr>
+        <a:xfrm>
+          <a:off x="0" y="0"/>
+          <a:ext cx="0" cy="0"/>
+          <a:chOff x="0" y="0"/>
+          <a:chExt cx="0" cy="0"/>
+        </a:xfrm>
+      </p:grpSpPr>
+      <p:sp>
+        <p:nvSpPr>
+          <p:cNvPr id="2" name="Rectangle 1">
+            <a:extLst>
+              <a:ext uri="{FF2B5EF4-FFF2-40B4-BE49-F238E27FC236}">
+                <a16:creationId xmlns:a16="http://schemas.microsoft.com/office/drawing/2014/main" id="{9190937C-E0C8-E674-5AA6-0C72C59221DE}"/>
+              </a:ext>
+            </a:extLst>
+          </p:cNvPr>
+          <p:cNvSpPr/>
+          <p:nvPr/>
+        </p:nvSpPr>
+        <p:spPr>
+          <a:xfrm>
+            <a:off x="0" y="0"/>
+            <a:ext cx="12191695" cy="6858000"/>
+          </a:xfrm>
+          <a:prstGeom prst="rect">
+            <a:avLst/>
+          </a:prstGeom>
+          <a:solidFill>
+            <a:srgbClr val="181C27"/>
+          </a:solidFill>
+          <a:ln>
+            <a:noFill/>
+          </a:ln>
+        </p:spPr>
+        <p:style>
+          <a:lnRef idx="1">
+            <a:schemeClr val="accent1"/>
+          </a:lnRef>
+          <a:fillRef idx="3">
+            <a:schemeClr val="accent1"/>
+          </a:fillRef>
+          <a:effectRef idx="2">
+            <a:schemeClr val="accent1"/>
+          </a:effectRef>
+          <a:fontRef idx="minor">
+            <a:schemeClr val="lt1"/>
+          </a:fontRef>
+        </p:style>
+        <p:txBody>
+          <a:bodyPr rtlCol="0" anchor="ctr"/>
+          <a:lstStyle/>
+          <a:p>
+            <a:pPr algn="ctr"/>
+            <a:endParaRPr/>
+          </a:p>
+        </p:txBody>
+      </p:sp>
+      <p:sp>
+        <p:nvSpPr>
+          <p:cNvPr id="3" name="Rectangle 2">
+            <a:extLst>
+              <a:ext uri="{FF2B5EF4-FFF2-40B4-BE49-F238E27FC236}">
+                <a16:creationId xmlns:a16="http://schemas.microsoft.com/office/drawing/2014/main" id="{295243BA-5246-108A-33C3-D41602114AC2}"/>
+              </a:ext>
+            </a:extLst>
+          </p:cNvPr>
+          <p:cNvSpPr/>
+          <p:nvPr/>
+        </p:nvSpPr>
+        <p:spPr>
+          <a:xfrm>
+            <a:off x="0" y="0"/>
+            <a:ext cx="73152" cy="6858000"/>
+          </a:xfrm>
+          <a:prstGeom prst="rect">
+            <a:avLst/>
+          </a:prstGeom>
+          <a:solidFill>
+            <a:srgbClr val="4F8CFF"/>
+          </a:solidFill>
+          <a:ln>
+            <a:noFill/>
+          </a:ln>
+        </p:spPr>
+        <p:style>
+          <a:lnRef idx="1">
+            <a:schemeClr val="accent1"/>
+          </a:lnRef>
+          <a:fillRef idx="3">
+            <a:schemeClr val="accent1"/>
+          </a:fillRef>
+          <a:effectRef idx="2">
+            <a:schemeClr val="accent1"/>
+          </a:effectRef>
+          <a:fontRef idx="minor">
+            <a:schemeClr val="lt1"/>
+          </a:fontRef>
+        </p:style>
+        <p:txBody>
+          <a:bodyPr rtlCol="0" anchor="ctr"/>
+          <a:lstStyle/>
+          <a:p>
+            <a:pPr algn="ctr"/>
+            <a:endParaRPr/>
+          </a:p>
+        </p:txBody>
+      </p:sp>
+      <p:sp>
+        <p:nvSpPr>
+          <p:cNvPr id="7" name="TextBox 6">
+            <a:extLst>
+              <a:ext uri="{FF2B5EF4-FFF2-40B4-BE49-F238E27FC236}">
+                <a16:creationId xmlns:a16="http://schemas.microsoft.com/office/drawing/2014/main" id="{85764E43-0D05-9F93-8309-5324F062B692}"/>
+              </a:ext>
+            </a:extLst>
+          </p:cNvPr>
+          <p:cNvSpPr txBox="1"/>
+          <p:nvPr/>
+        </p:nvSpPr>
+        <p:spPr>
+          <a:xfrm>
+            <a:off x="538327" y="401248"/>
+            <a:ext cx="11115040" cy="6055504"/>
+          </a:xfrm>
+          <a:prstGeom prst="rect">
+            <a:avLst/>
+          </a:prstGeom>
+          <a:noFill/>
+        </p:spPr>
+        <p:txBody>
+          <a:bodyPr wrap="square">
+            <a:spAutoFit/>
+          </a:bodyPr>
+          <a:lstStyle/>
+          <a:p>
+            <a:r>
+              <a:rPr lang="en-US" sz="1250" dirty="0">
+                <a:solidFill>
+                  <a:schemeClr val="bg1">
+                    <a:lumMod val="85000"/>
+                  </a:schemeClr>
+                </a:solidFill>
+                <a:latin typeface="JetBrains Mono" panose="02000009000000000000" pitchFamily="49" charset="0"/>
+                <a:ea typeface="JetBrains Mono" panose="02000009000000000000" pitchFamily="49" charset="0"/>
+                <a:cs typeface="JetBrains Mono" panose="02000009000000000000" pitchFamily="49" charset="0"/>
+              </a:rPr>
+              <a:t>[</a:t>
+            </a:r>
+          </a:p>
+          <a:p>
+            <a:r>
+              <a:rPr lang="en-US" sz="1250" dirty="0">
+                <a:solidFill>
+                  <a:schemeClr val="bg1">
+                    <a:lumMod val="85000"/>
+                  </a:schemeClr>
+                </a:solidFill>
+                <a:latin typeface="JetBrains Mono" panose="02000009000000000000" pitchFamily="49" charset="0"/>
+                <a:ea typeface="JetBrains Mono" panose="02000009000000000000" pitchFamily="49" charset="0"/>
+                <a:cs typeface="JetBrains Mono" panose="02000009000000000000" pitchFamily="49" charset="0"/>
+              </a:rPr>
+              <a:t>	"</a:t>
+            </a:r>
+            <a:r>
+              <a:rPr lang="en-US" sz="1250" dirty="0">
+                <a:solidFill>
+                  <a:schemeClr val="accent3">
+                    <a:lumMod val="40000"/>
+                    <a:lumOff val="60000"/>
+                  </a:schemeClr>
+                </a:solidFill>
+                <a:latin typeface="JetBrains Mono" panose="02000009000000000000" pitchFamily="49" charset="0"/>
+                <a:ea typeface="JetBrains Mono" panose="02000009000000000000" pitchFamily="49" charset="0"/>
+                <a:cs typeface="JetBrains Mono" panose="02000009000000000000" pitchFamily="49" charset="0"/>
+              </a:rPr>
+              <a:t>In patients with Type 2 diabetes and advanced kidney disease, how do clinicians manage the transition between pharmacological management of glycemic control and the initiation of renal replacement therapy, such as dialysis, and what specific lab values or symptoms typically trigger these changes?",</a:t>
+            </a:r>
+          </a:p>
+          <a:p>
+            <a:r>
+              <a:rPr lang="en-US" sz="1250" dirty="0">
+                <a:solidFill>
+                  <a:schemeClr val="bg1">
+                    <a:lumMod val="85000"/>
+                  </a:schemeClr>
+                </a:solidFill>
+                <a:latin typeface="JetBrains Mono" panose="02000009000000000000" pitchFamily="49" charset="0"/>
+                <a:ea typeface="JetBrains Mono" panose="02000009000000000000" pitchFamily="49" charset="0"/>
+                <a:cs typeface="JetBrains Mono" panose="02000009000000000000" pitchFamily="49" charset="0"/>
+              </a:rPr>
+              <a:t>	</a:t>
+            </a:r>
+          </a:p>
+          <a:p>
+            <a:r>
+              <a:rPr lang="en-US" sz="1250" dirty="0">
+                <a:solidFill>
+                  <a:schemeClr val="bg1">
+                    <a:lumMod val="85000"/>
+                  </a:schemeClr>
+                </a:solidFill>
+                <a:latin typeface="JetBrains Mono" panose="02000009000000000000" pitchFamily="49" charset="0"/>
+                <a:ea typeface="JetBrains Mono" panose="02000009000000000000" pitchFamily="49" charset="0"/>
+                <a:cs typeface="JetBrains Mono" panose="02000009000000000000" pitchFamily="49" charset="0"/>
+              </a:rPr>
+              <a:t>{</a:t>
+            </a:r>
+          </a:p>
+          <a:p>
+            <a:r>
+              <a:rPr lang="en-US" sz="1250" dirty="0">
+                <a:solidFill>
+                  <a:schemeClr val="bg1">
+                    <a:lumMod val="85000"/>
+                  </a:schemeClr>
+                </a:solidFill>
+                <a:latin typeface="JetBrains Mono" panose="02000009000000000000" pitchFamily="49" charset="0"/>
+                <a:ea typeface="JetBrains Mono" panose="02000009000000000000" pitchFamily="49" charset="0"/>
+                <a:cs typeface="JetBrains Mono" panose="02000009000000000000" pitchFamily="49" charset="0"/>
+              </a:rPr>
+              <a:t>		"fact": "Clinicians discontinue or hold oral hypoglycemics like metformin and glipizide in the setting of renal failure or decreased renal clearance to avoid complications such as lactic acidosis or hypoglycemia.",</a:t>
+            </a:r>
+          </a:p>
+          <a:p>
+            <a:r>
+              <a:rPr lang="en-US" sz="1250" dirty="0">
+                <a:solidFill>
+                  <a:schemeClr val="accent6">
+                    <a:lumMod val="60000"/>
+                    <a:lumOff val="40000"/>
+                  </a:schemeClr>
+                </a:solidFill>
+                <a:latin typeface="JetBrains Mono" panose="02000009000000000000" pitchFamily="49" charset="0"/>
+                <a:ea typeface="JetBrains Mono" panose="02000009000000000000" pitchFamily="49" charset="0"/>
+                <a:cs typeface="JetBrains Mono" panose="02000009000000000000" pitchFamily="49" charset="0"/>
+              </a:rPr>
+              <a:t>		"facet_label": "pharmacological_transition_renal_failure",</a:t>
+            </a:r>
+          </a:p>
+          <a:p>
+            <a:r>
+              <a:rPr lang="en-US" sz="1250" dirty="0">
+                <a:solidFill>
+                  <a:schemeClr val="bg1">
+                    <a:lumMod val="85000"/>
+                  </a:schemeClr>
+                </a:solidFill>
+                <a:latin typeface="JetBrains Mono" panose="02000009000000000000" pitchFamily="49" charset="0"/>
+                <a:ea typeface="JetBrains Mono" panose="02000009000000000000" pitchFamily="49" charset="0"/>
+                <a:cs typeface="JetBrains Mono" panose="02000009000000000000" pitchFamily="49" charset="0"/>
+              </a:rPr>
+              <a:t>		"chunk_ids": [</a:t>
+            </a:r>
+            <a:r>
+              <a:rPr lang="en-US" sz="1250">
+                <a:solidFill>
+                  <a:schemeClr val="bg1">
+                    <a:lumMod val="85000"/>
+                  </a:schemeClr>
+                </a:solidFill>
+                <a:latin typeface="JetBrains Mono" panose="02000009000000000000" pitchFamily="49" charset="0"/>
+                <a:ea typeface="JetBrains Mono" panose="02000009000000000000" pitchFamily="49" charset="0"/>
+                <a:cs typeface="JetBrains Mono" panose="02000009000000000000" pitchFamily="49" charset="0"/>
+              </a:rPr>
+              <a:t>	50962, 101542, 32657… </a:t>
+            </a:r>
+            <a:r>
+              <a:rPr lang="en-US" sz="1250" dirty="0">
+                <a:solidFill>
+                  <a:schemeClr val="bg1">
+                    <a:lumMod val="85000"/>
+                  </a:schemeClr>
+                </a:solidFill>
+                <a:latin typeface="JetBrains Mono" panose="02000009000000000000" pitchFamily="49" charset="0"/>
+                <a:ea typeface="JetBrains Mono" panose="02000009000000000000" pitchFamily="49" charset="0"/>
+                <a:cs typeface="JetBrains Mono" panose="02000009000000000000" pitchFamily="49" charset="0"/>
+              </a:rPr>
+              <a:t>]</a:t>
+            </a:r>
+          </a:p>
+          <a:p>
+            <a:r>
+              <a:rPr lang="en-US" sz="1250" dirty="0">
+                <a:solidFill>
+                  <a:schemeClr val="bg1">
+                    <a:lumMod val="85000"/>
+                  </a:schemeClr>
+                </a:solidFill>
+                <a:latin typeface="JetBrains Mono" panose="02000009000000000000" pitchFamily="49" charset="0"/>
+                <a:ea typeface="JetBrains Mono" panose="02000009000000000000" pitchFamily="49" charset="0"/>
+                <a:cs typeface="JetBrains Mono" panose="02000009000000000000" pitchFamily="49" charset="0"/>
+              </a:rPr>
+              <a:t>		]</a:t>
+            </a:r>
+          </a:p>
+          <a:p>
+            <a:r>
+              <a:rPr lang="en-US" sz="1250" dirty="0">
+                <a:solidFill>
+                  <a:schemeClr val="bg1">
+                    <a:lumMod val="85000"/>
+                  </a:schemeClr>
+                </a:solidFill>
+                <a:latin typeface="JetBrains Mono" panose="02000009000000000000" pitchFamily="49" charset="0"/>
+                <a:ea typeface="JetBrains Mono" panose="02000009000000000000" pitchFamily="49" charset="0"/>
+                <a:cs typeface="JetBrains Mono" panose="02000009000000000000" pitchFamily="49" charset="0"/>
+              </a:rPr>
+              <a:t>	},</a:t>
+            </a:r>
+          </a:p>
+          <a:p>
+            <a:r>
+              <a:rPr lang="en-US" sz="1250" dirty="0">
+                <a:solidFill>
+                  <a:schemeClr val="bg1">
+                    <a:lumMod val="85000"/>
+                  </a:schemeClr>
+                </a:solidFill>
+                <a:latin typeface="JetBrains Mono" panose="02000009000000000000" pitchFamily="49" charset="0"/>
+                <a:ea typeface="JetBrains Mono" panose="02000009000000000000" pitchFamily="49" charset="0"/>
+                <a:cs typeface="JetBrains Mono" panose="02000009000000000000" pitchFamily="49" charset="0"/>
+              </a:rPr>
+              <a:t>	{</a:t>
+            </a:r>
+          </a:p>
+          <a:p>
+            <a:r>
+              <a:rPr lang="en-US" sz="1250" dirty="0">
+                <a:solidFill>
+                  <a:schemeClr val="bg1">
+                    <a:lumMod val="85000"/>
+                  </a:schemeClr>
+                </a:solidFill>
+                <a:latin typeface="JetBrains Mono" panose="02000009000000000000" pitchFamily="49" charset="0"/>
+                <a:ea typeface="JetBrains Mono" panose="02000009000000000000" pitchFamily="49" charset="0"/>
+                <a:cs typeface="JetBrains Mono" panose="02000009000000000000" pitchFamily="49" charset="0"/>
+              </a:rPr>
+              <a:t>		"fact": "Insulin doses are downtitrated or reduced when renal failure is present due to decreased renal clearance of insulin, which increases the risk of hypoglycemia.",</a:t>
+            </a:r>
+          </a:p>
+          <a:p>
+            <a:r>
+              <a:rPr lang="en-US" sz="1250" dirty="0">
+                <a:solidFill>
+                  <a:schemeClr val="accent6">
+                    <a:lumMod val="60000"/>
+                    <a:lumOff val="40000"/>
+                  </a:schemeClr>
+                </a:solidFill>
+                <a:latin typeface="JetBrains Mono" panose="02000009000000000000" pitchFamily="49" charset="0"/>
+                <a:ea typeface="JetBrains Mono" panose="02000009000000000000" pitchFamily="49" charset="0"/>
+                <a:cs typeface="JetBrains Mono" panose="02000009000000000000" pitchFamily="49" charset="0"/>
+              </a:rPr>
+              <a:t>		"facet_label": "insulin_dose_adjustment_renal_failure",</a:t>
+            </a:r>
+          </a:p>
+          <a:p>
+            <a:r>
+              <a:rPr lang="en-US" sz="1250" dirty="0">
+                <a:solidFill>
+                  <a:schemeClr val="bg1">
+                    <a:lumMod val="85000"/>
+                  </a:schemeClr>
+                </a:solidFill>
+                <a:latin typeface="JetBrains Mono" panose="02000009000000000000" pitchFamily="49" charset="0"/>
+                <a:ea typeface="JetBrains Mono" panose="02000009000000000000" pitchFamily="49" charset="0"/>
+                <a:cs typeface="JetBrains Mono" panose="02000009000000000000" pitchFamily="49" charset="0"/>
+              </a:rPr>
+              <a:t>		"chunk_ids": [ … ]</a:t>
+            </a:r>
+          </a:p>
+          <a:p>
+            <a:r>
+              <a:rPr lang="en-US" sz="1250" dirty="0">
+                <a:solidFill>
+                  <a:schemeClr val="bg1">
+                    <a:lumMod val="85000"/>
+                  </a:schemeClr>
+                </a:solidFill>
+                <a:latin typeface="JetBrains Mono" panose="02000009000000000000" pitchFamily="49" charset="0"/>
+                <a:ea typeface="JetBrains Mono" panose="02000009000000000000" pitchFamily="49" charset="0"/>
+                <a:cs typeface="JetBrains Mono" panose="02000009000000000000" pitchFamily="49" charset="0"/>
+              </a:rPr>
+              <a:t>},</a:t>
+            </a:r>
+          </a:p>
+          <a:p>
+            <a:r>
+              <a:rPr lang="en-US" sz="1250" dirty="0">
+                <a:solidFill>
+                  <a:schemeClr val="bg1">
+                    <a:lumMod val="85000"/>
+                  </a:schemeClr>
+                </a:solidFill>
+                <a:latin typeface="JetBrains Mono" panose="02000009000000000000" pitchFamily="49" charset="0"/>
+                <a:ea typeface="JetBrains Mono" panose="02000009000000000000" pitchFamily="49" charset="0"/>
+                <a:cs typeface="JetBrains Mono" panose="02000009000000000000" pitchFamily="49" charset="0"/>
+              </a:rPr>
+              <a:t>	{</a:t>
+            </a:r>
+          </a:p>
+          <a:p>
+            <a:r>
+              <a:rPr lang="en-US" sz="1250" dirty="0">
+                <a:solidFill>
+                  <a:schemeClr val="bg1">
+                    <a:lumMod val="85000"/>
+                  </a:schemeClr>
+                </a:solidFill>
+                <a:latin typeface="JetBrains Mono" panose="02000009000000000000" pitchFamily="49" charset="0"/>
+                <a:ea typeface="JetBrains Mono" panose="02000009000000000000" pitchFamily="49" charset="0"/>
+                <a:cs typeface="JetBrains Mono" panose="02000009000000000000" pitchFamily="49" charset="0"/>
+              </a:rPr>
+              <a:t>		"fact": "Some patients completely cease the use of insulin or other diabetes medications upon the initiation of dialysis.",</a:t>
+            </a:r>
+          </a:p>
+          <a:p>
+            <a:r>
+              <a:rPr lang="en-US" sz="1250" dirty="0">
+                <a:solidFill>
+                  <a:schemeClr val="accent6">
+                    <a:lumMod val="60000"/>
+                    <a:lumOff val="40000"/>
+                  </a:schemeClr>
+                </a:solidFill>
+                <a:latin typeface="JetBrains Mono" panose="02000009000000000000" pitchFamily="49" charset="0"/>
+                <a:ea typeface="JetBrains Mono" panose="02000009000000000000" pitchFamily="49" charset="0"/>
+                <a:cs typeface="JetBrains Mono" panose="02000009000000000000" pitchFamily="49" charset="0"/>
+              </a:rPr>
+              <a:t>		"facet_label": "dialysis_impact_on_glycemic_management",</a:t>
+            </a:r>
+          </a:p>
+          <a:p>
+            <a:r>
+              <a:rPr lang="en-US" sz="1250" dirty="0">
+                <a:solidFill>
+                  <a:schemeClr val="bg1">
+                    <a:lumMod val="85000"/>
+                  </a:schemeClr>
+                </a:solidFill>
+                <a:latin typeface="JetBrains Mono" panose="02000009000000000000" pitchFamily="49" charset="0"/>
+                <a:ea typeface="JetBrains Mono" panose="02000009000000000000" pitchFamily="49" charset="0"/>
+                <a:cs typeface="JetBrains Mono" panose="02000009000000000000" pitchFamily="49" charset="0"/>
+              </a:rPr>
+              <a:t>		"chunk_ids": [ … ]</a:t>
+            </a:r>
+          </a:p>
+          <a:p>
+            <a:r>
+              <a:rPr lang="en-US" sz="1250" dirty="0">
+                <a:solidFill>
+                  <a:schemeClr val="bg1">
+                    <a:lumMod val="85000"/>
+                  </a:schemeClr>
+                </a:solidFill>
+                <a:latin typeface="JetBrains Mono" panose="02000009000000000000" pitchFamily="49" charset="0"/>
+                <a:ea typeface="JetBrains Mono" panose="02000009000000000000" pitchFamily="49" charset="0"/>
+                <a:cs typeface="JetBrains Mono" panose="02000009000000000000" pitchFamily="49" charset="0"/>
+              </a:rPr>
+              <a:t>	},</a:t>
+            </a:r>
+          </a:p>
+          <a:p>
+            <a:r>
+              <a:rPr lang="en-US" sz="1250" dirty="0">
+                <a:solidFill>
+                  <a:schemeClr val="bg1">
+                    <a:lumMod val="85000"/>
+                  </a:schemeClr>
+                </a:solidFill>
+                <a:latin typeface="JetBrains Mono" panose="02000009000000000000" pitchFamily="49" charset="0"/>
+                <a:ea typeface="JetBrains Mono" panose="02000009000000000000" pitchFamily="49" charset="0"/>
+                <a:cs typeface="JetBrains Mono" panose="02000009000000000000" pitchFamily="49" charset="0"/>
+              </a:rPr>
+              <a:t>	{</a:t>
+            </a:r>
+          </a:p>
+          <a:p>
+            <a:r>
+              <a:rPr lang="en-US" sz="1250" dirty="0">
+                <a:solidFill>
+                  <a:schemeClr val="bg1">
+                    <a:lumMod val="85000"/>
+                  </a:schemeClr>
+                </a:solidFill>
+                <a:latin typeface="JetBrains Mono" panose="02000009000000000000" pitchFamily="49" charset="0"/>
+                <a:ea typeface="JetBrains Mono" panose="02000009000000000000" pitchFamily="49" charset="0"/>
+                <a:cs typeface="JetBrains Mono" panose="02000009000000000000" pitchFamily="49" charset="0"/>
+              </a:rPr>
+              <a:t>		"fact": "Specific triggers for adjusting diabetes medications include severe hypoglycemia (e.g., BG 27-40), acute kidney injury (elevated creatinine), and the initiation of renal replacement therapy.",</a:t>
+            </a:r>
+          </a:p>
+          <a:p>
+            <a:r>
+              <a:rPr lang="en-US" sz="1250" dirty="0">
+                <a:solidFill>
+                  <a:schemeClr val="accent6">
+                    <a:lumMod val="60000"/>
+                    <a:lumOff val="40000"/>
+                  </a:schemeClr>
+                </a:solidFill>
+                <a:latin typeface="JetBrains Mono" panose="02000009000000000000" pitchFamily="49" charset="0"/>
+                <a:ea typeface="JetBrains Mono" panose="02000009000000000000" pitchFamily="49" charset="0"/>
+                <a:cs typeface="JetBrains Mono" panose="02000009000000000000" pitchFamily="49" charset="0"/>
+              </a:rPr>
+              <a:t>		"facet_label": "triggers_for_medication_change",</a:t>
+            </a:r>
+          </a:p>
+          <a:p>
+            <a:r>
+              <a:rPr lang="en-US" sz="1250" dirty="0">
+                <a:solidFill>
+                  <a:schemeClr val="bg1">
+                    <a:lumMod val="85000"/>
+                  </a:schemeClr>
+                </a:solidFill>
+                <a:latin typeface="JetBrains Mono" panose="02000009000000000000" pitchFamily="49" charset="0"/>
+                <a:ea typeface="JetBrains Mono" panose="02000009000000000000" pitchFamily="49" charset="0"/>
+                <a:cs typeface="JetBrains Mono" panose="02000009000000000000" pitchFamily="49" charset="0"/>
+              </a:rPr>
+              <a:t>		"chunk_ids": [ … ]</a:t>
+            </a:r>
+          </a:p>
+          <a:p>
+            <a:r>
+              <a:rPr lang="en-US" sz="1250" dirty="0">
+                <a:solidFill>
+                  <a:schemeClr val="bg1">
+                    <a:lumMod val="85000"/>
+                  </a:schemeClr>
+                </a:solidFill>
+                <a:latin typeface="JetBrains Mono" panose="02000009000000000000" pitchFamily="49" charset="0"/>
+                <a:ea typeface="JetBrains Mono" panose="02000009000000000000" pitchFamily="49" charset="0"/>
+                <a:cs typeface="JetBrains Mono" panose="02000009000000000000" pitchFamily="49" charset="0"/>
+              </a:rPr>
+              <a:t>	}</a:t>
+            </a:r>
+          </a:p>
+          <a:p>
+            <a:r>
+              <a:rPr lang="en-US" sz="1250" dirty="0">
+                <a:solidFill>
+                  <a:schemeClr val="bg1">
+                    <a:lumMod val="85000"/>
+                  </a:schemeClr>
+                </a:solidFill>
+                <a:latin typeface="JetBrains Mono" panose="02000009000000000000" pitchFamily="49" charset="0"/>
+                <a:ea typeface="JetBrains Mono" panose="02000009000000000000" pitchFamily="49" charset="0"/>
+                <a:cs typeface="JetBrains Mono" panose="02000009000000000000" pitchFamily="49" charset="0"/>
+              </a:rPr>
+              <a:t>]</a:t>
+            </a:r>
+          </a:p>
+        </p:txBody>
+      </p:sp>
+      <p:sp>
+        <p:nvSpPr>
+          <p:cNvPr id="9" name="Slide Number Placeholder 8">
+            <a:extLst>
+              <a:ext uri="{FF2B5EF4-FFF2-40B4-BE49-F238E27FC236}">
+                <a16:creationId xmlns:a16="http://schemas.microsoft.com/office/drawing/2014/main" id="{BD0FF4A5-5E6D-DF75-AA10-00A21947DD68}"/>
+              </a:ext>
+            </a:extLst>
+          </p:cNvPr>
+          <p:cNvSpPr>
+            <a:spLocks noGrp="1"/>
+          </p:cNvSpPr>
+          <p:nvPr>
+            <p:ph type="sldNum" sz="quarter" idx="12"/>
+          </p:nvPr>
+        </p:nvSpPr>
+        <p:spPr/>
+        <p:txBody>
+          <a:bodyPr/>
+          <a:lstStyle/>
+          <a:p>
+            <a:fld id="{C1FF6DA9-008F-8B48-92A6-B652298478BF}" type="slidenum">
+              <a:rPr lang="en-US" smtClean="0"/>
+              <a:t>15</a:t>
+            </a:fld>
+            <a:endParaRPr lang="en-US"/>
+          </a:p>
+        </p:txBody>
+      </p:sp>
+    </p:spTree>
+    <p:extLst>
+      <p:ext uri="{BB962C8B-B14F-4D97-AF65-F5344CB8AC3E}">
+        <p14:creationId xmlns:p14="http://schemas.microsoft.com/office/powerpoint/2010/main" val="282823493"/>
+      </p:ext>
+    </p:extLst>
+  </p:cSld>
+  <p:clrMapOvr>
+    <a:masterClrMapping/>
+  </p:clrMapOvr>
+</p:sld>
+</file>
+
+<file path=ppt/slides/slide16.xml><?xml version="1.0" encoding="utf-8"?>
+<p:sld xmlns:a="http://schemas.openxmlformats.org/drawingml/2006/main" xmlns:r="http://schemas.openxmlformats.org/officeDocument/2006/relationships" xmlns:p="http://schemas.openxmlformats.org/presentationml/2006/main">
+  <p:cSld>
     <p:bg>
       <p:bgPr>
         <a:solidFill>
@@ -7392,8 +8006,8 @@
           </a:p>
         </p:txBody>
       </p:sp>
-      <mc:AlternateContent xmlns:mc="http://schemas.openxmlformats.org/markup-compatibility/2006" xmlns:a14="http://schemas.microsoft.com/office/drawing/2010/main">
-        <mc:Choice Requires="a14">
+      <mc:AlternateContent xmlns:mc="http://schemas.openxmlformats.org/markup-compatibility/2006">
+        <mc:Choice xmlns:a14="http://schemas.microsoft.com/office/drawing/2010/main" Requires="a14">
           <p:graphicFrame>
             <p:nvGraphicFramePr>
               <p:cNvPr id="6" name="Table 5"/>
@@ -7403,14 +8017,14 @@
               <p:nvPr>
                 <p:extLst>
                   <p:ext uri="{D42A27DB-BD31-4B8C-83A1-F6EECF244321}">
-                    <p14:modId xmlns:p14="http://schemas.microsoft.com/office/powerpoint/2010/main" val="3692014704"/>
+                    <p14:modId xmlns:p14="http://schemas.microsoft.com/office/powerpoint/2010/main" val="3214388658"/>
                   </p:ext>
                 </p:extLst>
               </p:nvPr>
             </p:nvGraphicFramePr>
             <p:xfrm>
               <a:off x="1046480" y="1645919"/>
-              <a:ext cx="10099040" cy="3777585"/>
+              <a:ext cx="10099040" cy="4652879"/>
             </p:xfrm>
             <a:graphic>
               <a:graphicData uri="http://schemas.openxmlformats.org/drawingml/2006/table">
@@ -7628,6 +8242,40 @@
                                       </a:rPr>
                                       <m:t>∈</m:t>
                                     </m:r>
+                                    <m:sSub>
+                                      <m:sSubPr>
+                                        <m:ctrlPr>
+                                          <a:rPr lang="en-001" sz="1600" b="0" i="1" dirty="0" smtClean="0">
+                                            <a:solidFill>
+                                              <a:srgbClr val="F0F0F5"/>
+                                            </a:solidFill>
+                                            <a:latin typeface="Cambria Math" panose="02040503050406030204" pitchFamily="18" charset="0"/>
+                                          </a:rPr>
+                                        </m:ctrlPr>
+                                      </m:sSubPr>
+                                      <m:e>
+                                        <m:r>
+                                          <a:rPr lang="en-US" sz="1600" b="0" i="1" dirty="0" smtClean="0">
+                                            <a:solidFill>
+                                              <a:srgbClr val="F0F0F5"/>
+                                            </a:solidFill>
+                                            <a:latin typeface="Cambria Math" panose="02040503050406030204" pitchFamily="18" charset="0"/>
+                                          </a:rPr>
+                                          <m:t>𝐹</m:t>
+                                        </m:r>
+                                      </m:e>
+                                      <m:sub>
+                                        <m:r>
+                                          <a:rPr lang="en-US" sz="1600" b="0" i="1" dirty="0" smtClean="0">
+                                            <a:solidFill>
+                                              <a:srgbClr val="F0F0F5"/>
+                                            </a:solidFill>
+                                            <a:latin typeface="Cambria Math" panose="02040503050406030204" pitchFamily="18" charset="0"/>
+                                          </a:rPr>
+                                          <m:t>𝑞𝑢𝑒𝑟𝑦</m:t>
+                                        </m:r>
+                                      </m:sub>
+                                    </m:sSub>
                                     <m:r>
                                       <a:rPr lang="en-001" sz="1600" b="0" i="1" dirty="0" smtClean="0">
                                         <a:solidFill>
@@ -7635,16 +8283,7 @@
                                         </a:solidFill>
                                         <a:latin typeface="Cambria Math" panose="02040503050406030204" pitchFamily="18" charset="0"/>
                                       </a:rPr>
-                                      <m:t>𝐹</m:t>
-                                    </m:r>
-                                    <m:r>
-                                      <a:rPr lang="en-001" sz="1600" b="0" i="1" dirty="0" smtClean="0">
-                                        <a:solidFill>
-                                          <a:srgbClr val="F0F0F5"/>
-                                        </a:solidFill>
-                                        <a:latin typeface="Cambria Math" panose="02040503050406030204" pitchFamily="18" charset="0"/>
-                                      </a:rPr>
-                                      <m:t> : ∃ </m:t>
+                                      <m:t>: ∃ </m:t>
                                     </m:r>
                                     <m:r>
                                       <a:rPr lang="en-US" sz="1600" b="0" i="1" dirty="0" smtClean="0">
@@ -7747,15 +8386,40 @@
                                       </a:rPr>
                                       <m:t>|</m:t>
                                     </m:r>
-                                    <m:r>
-                                      <a:rPr lang="en-001" sz="1600" b="0" i="1" dirty="0" smtClean="0">
-                                        <a:solidFill>
-                                          <a:srgbClr val="F0F0F5"/>
-                                        </a:solidFill>
-                                        <a:latin typeface="Cambria Math" panose="02040503050406030204" pitchFamily="18" charset="0"/>
-                                      </a:rPr>
-                                      <m:t>𝐹</m:t>
-                                    </m:r>
+                                    <m:sSub>
+                                      <m:sSubPr>
+                                        <m:ctrlPr>
+                                          <a:rPr lang="en-001" sz="1600" b="0" i="1" dirty="0" smtClean="0">
+                                            <a:solidFill>
+                                              <a:srgbClr val="F0F0F5"/>
+                                            </a:solidFill>
+                                            <a:latin typeface="Cambria Math" panose="02040503050406030204" pitchFamily="18" charset="0"/>
+                                          </a:rPr>
+                                        </m:ctrlPr>
+                                      </m:sSubPr>
+                                      <m:e>
+                                        <m:r>
+                                          <a:rPr lang="en-US" sz="1600" b="0" i="1" dirty="0" smtClean="0">
+                                            <a:solidFill>
+                                              <a:srgbClr val="F0F0F5"/>
+                                            </a:solidFill>
+                                            <a:latin typeface="Cambria Math" panose="02040503050406030204" pitchFamily="18" charset="0"/>
+                                          </a:rPr>
+                                          <m:t>𝐹</m:t>
+                                        </m:r>
+                                      </m:e>
+                                      <m:sub>
+                                        <m:r>
+                                          <a:rPr lang="en-US" sz="1600" b="0" i="1" dirty="0" smtClean="0">
+                                            <a:solidFill>
+                                              <a:srgbClr val="F0F0F5"/>
+                                            </a:solidFill>
+                                            <a:latin typeface="Cambria Math" panose="02040503050406030204" pitchFamily="18" charset="0"/>
+                                          </a:rPr>
+                                          <m:t>𝑞𝑢𝑒𝑟𝑦</m:t>
+                                        </m:r>
+                                      </m:sub>
+                                    </m:sSub>
                                     <m:r>
                                       <a:rPr lang="en-001" sz="1600" b="0" i="1" dirty="0" smtClean="0">
                                         <a:solidFill>
@@ -7805,6 +8469,111 @@
                     <a:extLst>
                       <a:ext uri="{0D108BD9-81ED-4DB2-BD59-A6C34878D82A}">
                         <a16:rowId xmlns:a16="http://schemas.microsoft.com/office/drawing/2014/main" val="10001"/>
+                      </a:ext>
+                    </a:extLst>
+                  </a:tr>
+                  <a:tr h="875294">
+                    <a:tc>
+                      <a:txBody>
+                        <a:bodyPr/>
+                        <a:lstStyle/>
+                        <a:p>
+                          <a:pPr algn="l"/>
+                          <a:r>
+                            <a:rPr lang="en-US" sz="1400" b="1" i="0" dirty="0">
+                              <a:solidFill>
+                                <a:srgbClr val="4F8CFF"/>
+                              </a:solidFill>
+                              <a:latin typeface="Segoe UI"/>
+                            </a:rPr>
+                            <a:t>Weighted Aspect Recall</a:t>
+                          </a:r>
+                          <a:endParaRPr sz="1400" b="1" i="0" dirty="0">
+                            <a:solidFill>
+                              <a:srgbClr val="4F8CFF"/>
+                            </a:solidFill>
+                            <a:latin typeface="Segoe UI"/>
+                          </a:endParaRPr>
+                        </a:p>
+                      </a:txBody>
+                      <a:tcPr anchor="ctr">
+                        <a:solidFill>
+                          <a:srgbClr val="1C212F"/>
+                        </a:solidFill>
+                      </a:tcPr>
+                    </a:tc>
+                    <a:tc>
+                      <a:txBody>
+                        <a:bodyPr/>
+                        <a:lstStyle/>
+                        <a:p>
+                          <a:pPr marL="0" marR="0" lvl="0" indent="0" algn="l" defTabSz="457200" rtl="0" eaLnBrk="1" fontAlgn="auto" latinLnBrk="0" hangingPunct="1">
+                            <a:lnSpc>
+                              <a:spcPct val="100000"/>
+                            </a:lnSpc>
+                            <a:spcBef>
+                              <a:spcPts val="0"/>
+                            </a:spcBef>
+                            <a:spcAft>
+                              <a:spcPts val="0"/>
+                            </a:spcAft>
+                            <a:buClrTx/>
+                            <a:buSzTx/>
+                            <a:buFontTx/>
+                            <a:buNone/>
+                            <a:tabLst/>
+                            <a:defRPr/>
+                          </a:pPr>
+                          <a:r>
+                            <a:rPr lang="en-US" sz="1600" b="0" i="0" dirty="0">
+                              <a:solidFill>
+                                <a:srgbClr val="F0F0F5"/>
+                              </a:solidFill>
+                              <a:latin typeface="Segoe UI"/>
+                            </a:rPr>
+                            <a:t>retrieved gold chunks / total gold chunks for a facet</a:t>
+                          </a:r>
+                          <a:endParaRPr sz="1600" dirty="0"/>
+                        </a:p>
+                      </a:txBody>
+                      <a:tcPr anchor="ctr">
+                        <a:solidFill>
+                          <a:srgbClr val="1C212F"/>
+                        </a:solidFill>
+                      </a:tcPr>
+                    </a:tc>
+                    <a:tc>
+                      <a:txBody>
+                        <a:bodyPr/>
+                        <a:lstStyle/>
+                        <a:p>
+                          <a:pPr algn="l"/>
+                          <a:r>
+                            <a:rPr lang="en-US" sz="1600" b="0" i="0" dirty="0">
+                              <a:solidFill>
+                                <a:srgbClr val="F0F0F5"/>
+                              </a:solidFill>
+                              <a:latin typeface="Segoe UI"/>
+                            </a:rPr>
+                            <a:t>measures how completely each facet is covered</a:t>
+                          </a:r>
+                          <a:endParaRPr sz="1600" b="0" i="0" dirty="0">
+                            <a:solidFill>
+                              <a:srgbClr val="F0F0F5"/>
+                            </a:solidFill>
+                            <a:latin typeface="Segoe UI"/>
+                          </a:endParaRPr>
+                        </a:p>
+                      </a:txBody>
+                      <a:tcPr anchor="ctr">
+                        <a:solidFill>
+                          <a:srgbClr val="1C212F"/>
+                        </a:solidFill>
+                      </a:tcPr>
+                    </a:tc>
+                    <a:extLst>
+                      <a:ext uri="{0D108BD9-81ED-4DB2-BD59-A6C34878D82A}">
+                        <a16:rowId xmlns:a16="http://schemas.microsoft.com/office/drawing/2014/main" val="3597994416"/>
                       </a:ext>
                     </a:extLst>
                   </a:tr>
@@ -8358,14 +9127,20 @@
                         <a:p>
                           <a:pPr algn="l"/>
                           <a:r>
-                            <a:rPr sz="1400" b="1" i="0">
+                            <a:rPr lang="en-US" sz="1400" b="1" i="0" dirty="0" err="1">
                               <a:solidFill>
                                 <a:srgbClr val="4F8CFF"/>
                               </a:solidFill>
                               <a:latin typeface="Segoe UI"/>
                             </a:rPr>
-                            <a:t>DocRec / FactRec</a:t>
+                            <a:t>GoldRecall</a:t>
                           </a:r>
+                          <a:endParaRPr sz="1400" b="1" i="0" dirty="0">
+                            <a:solidFill>
+                              <a:srgbClr val="4F8CFF"/>
+                            </a:solidFill>
+                            <a:latin typeface="Segoe UI"/>
+                          </a:endParaRPr>
                         </a:p>
                       </a:txBody>
                       <a:tcPr anchor="ctr">
@@ -8387,7 +9162,7 @@
                               </a:solidFill>
                               <a:latin typeface="Segoe UI"/>
                             </a:rPr>
-                            <a:t>Gold doc/fact fraction recovered</a:t>
+                            <a:t>Gold doc fraction recovered</a:t>
                           </a:r>
                         </a:p>
                       </a:txBody>
@@ -8431,7 +9206,7 @@
             </a:graphic>
           </p:graphicFrame>
         </mc:Choice>
-        <mc:Fallback xmlns="">
+        <mc:Fallback>
           <p:graphicFrame>
             <p:nvGraphicFramePr>
               <p:cNvPr id="6" name="Table 5"/>
@@ -8441,14 +9216,14 @@
               <p:nvPr>
                 <p:extLst>
                   <p:ext uri="{D42A27DB-BD31-4B8C-83A1-F6EECF244321}">
-                    <p14:modId xmlns:p14="http://schemas.microsoft.com/office/powerpoint/2010/main" val="3692014704"/>
+                    <p14:modId xmlns:p14="http://schemas.microsoft.com/office/powerpoint/2010/main" val="3214388658"/>
                   </p:ext>
                 </p:extLst>
               </p:nvPr>
             </p:nvGraphicFramePr>
             <p:xfrm>
               <a:off x="1046480" y="1645919"/>
-              <a:ext cx="10099040" cy="3777585"/>
+              <a:ext cx="10099040" cy="4652879"/>
             </p:xfrm>
             <a:graphic>
               <a:graphicData uri="http://schemas.openxmlformats.org/drawingml/2006/table">
@@ -8591,7 +9366,7 @@
                         <a:blipFill>
                           <a:blip r:embed="rId2"/>
                           <a:stretch>
-                            <a:fillRect l="-41460" t="-56643" r="-87328" b="-279720"/>
+                            <a:fillRect l="-41460" t="-56643" r="-87328" b="-380420"/>
                           </a:stretch>
                         </a:blipFill>
                       </a:tcPr>
@@ -8622,6 +9397,111 @@
                     <a:extLst>
                       <a:ext uri="{0D108BD9-81ED-4DB2-BD59-A6C34878D82A}">
                         <a16:rowId xmlns:a16="http://schemas.microsoft.com/office/drawing/2014/main" val="10001"/>
+                      </a:ext>
+                    </a:extLst>
+                  </a:tr>
+                  <a:tr h="875294">
+                    <a:tc>
+                      <a:txBody>
+                        <a:bodyPr/>
+                        <a:lstStyle/>
+                        <a:p>
+                          <a:pPr algn="l"/>
+                          <a:r>
+                            <a:rPr lang="en-US" sz="1400" b="1" i="0" dirty="0">
+                              <a:solidFill>
+                                <a:srgbClr val="4F8CFF"/>
+                              </a:solidFill>
+                              <a:latin typeface="Segoe UI"/>
+                            </a:rPr>
+                            <a:t>Weighted Aspect Recall</a:t>
+                          </a:r>
+                          <a:endParaRPr sz="1400" b="1" i="0" dirty="0">
+                            <a:solidFill>
+                              <a:srgbClr val="4F8CFF"/>
+                            </a:solidFill>
+                            <a:latin typeface="Segoe UI"/>
+                          </a:endParaRPr>
+                        </a:p>
+                      </a:txBody>
+                      <a:tcPr anchor="ctr">
+                        <a:solidFill>
+                          <a:srgbClr val="1C212F"/>
+                        </a:solidFill>
+                      </a:tcPr>
+                    </a:tc>
+                    <a:tc>
+                      <a:txBody>
+                        <a:bodyPr/>
+                        <a:lstStyle/>
+                        <a:p>
+                          <a:pPr marL="0" marR="0" lvl="0" indent="0" algn="l" defTabSz="457200" rtl="0" eaLnBrk="1" fontAlgn="auto" latinLnBrk="0" hangingPunct="1">
+                            <a:lnSpc>
+                              <a:spcPct val="100000"/>
+                            </a:lnSpc>
+                            <a:spcBef>
+                              <a:spcPts val="0"/>
+                            </a:spcBef>
+                            <a:spcAft>
+                              <a:spcPts val="0"/>
+                            </a:spcAft>
+                            <a:buClrTx/>
+                            <a:buSzTx/>
+                            <a:buFontTx/>
+                            <a:buNone/>
+                            <a:tabLst/>
+                            <a:defRPr/>
+                          </a:pPr>
+                          <a:r>
+                            <a:rPr lang="en-US" sz="1600" b="0" i="0" dirty="0">
+                              <a:solidFill>
+                                <a:srgbClr val="F0F0F5"/>
+                              </a:solidFill>
+                              <a:latin typeface="Segoe UI"/>
+                            </a:rPr>
+                            <a:t>retrieved gold chunks / total gold chunks for a facet</a:t>
+                          </a:r>
+                          <a:endParaRPr sz="1600" dirty="0"/>
+                        </a:p>
+                      </a:txBody>
+                      <a:tcPr anchor="ctr">
+                        <a:solidFill>
+                          <a:srgbClr val="1C212F"/>
+                        </a:solidFill>
+                      </a:tcPr>
+                    </a:tc>
+                    <a:tc>
+                      <a:txBody>
+                        <a:bodyPr/>
+                        <a:lstStyle/>
+                        <a:p>
+                          <a:pPr algn="l"/>
+                          <a:r>
+                            <a:rPr lang="en-US" sz="1600" b="0" i="0" dirty="0">
+                              <a:solidFill>
+                                <a:srgbClr val="F0F0F5"/>
+                              </a:solidFill>
+                              <a:latin typeface="Segoe UI"/>
+                            </a:rPr>
+                            <a:t>measures how completely each facet is covered</a:t>
+                          </a:r>
+                          <a:endParaRPr sz="1600" b="0" i="0" dirty="0">
+                            <a:solidFill>
+                              <a:srgbClr val="F0F0F5"/>
+                            </a:solidFill>
+                            <a:latin typeface="Segoe UI"/>
+                          </a:endParaRPr>
+                        </a:p>
+                      </a:txBody>
+                      <a:tcPr anchor="ctr">
+                        <a:solidFill>
+                          <a:srgbClr val="1C212F"/>
+                        </a:solidFill>
+                      </a:tcPr>
+                    </a:tc>
+                    <a:extLst>
+                      <a:ext uri="{0D108BD9-81ED-4DB2-BD59-A6C34878D82A}">
+                        <a16:rowId xmlns:a16="http://schemas.microsoft.com/office/drawing/2014/main" val="3597994416"/>
                       </a:ext>
                     </a:extLst>
                   </a:tr>
@@ -8679,7 +9559,7 @@
                         <a:blipFill>
                           <a:blip r:embed="rId2"/>
                           <a:stretch>
-                            <a:fillRect l="-41460" t="-163504" r="-87328" b="-191971"/>
+                            <a:fillRect l="-41460" t="-268613" r="-87328" b="-191971"/>
                           </a:stretch>
                         </a:blipFill>
                       </a:tcPr>
@@ -8749,7 +9629,7 @@
                         <a:blipFill>
                           <a:blip r:embed="rId2"/>
                           <a:stretch>
-                            <a:fillRect l="-41460" t="-254225" r="-87328" b="-85211"/>
+                            <a:fillRect l="-41460" t="-355634" r="-87328" b="-85211"/>
                           </a:stretch>
                         </a:blipFill>
                       </a:tcPr>
@@ -8809,14 +9689,20 @@
                         <a:p>
                           <a:pPr algn="l"/>
                           <a:r>
-                            <a:rPr sz="1400" b="1" i="0">
+                            <a:rPr lang="en-US" sz="1400" b="1" i="0" dirty="0" err="1">
                               <a:solidFill>
                                 <a:srgbClr val="4F8CFF"/>
                               </a:solidFill>
                               <a:latin typeface="Segoe UI"/>
                             </a:rPr>
-                            <a:t>DocRec / FactRec</a:t>
+                            <a:t>GoldRecall</a:t>
                           </a:r>
+                          <a:endParaRPr sz="1400" b="1" i="0" dirty="0">
+                            <a:solidFill>
+                              <a:srgbClr val="4F8CFF"/>
+                            </a:solidFill>
+                            <a:latin typeface="Segoe UI"/>
+                          </a:endParaRPr>
                         </a:p>
                       </a:txBody>
                       <a:tcPr anchor="ctr">
@@ -8838,7 +9724,7 @@
                               </a:solidFill>
                               <a:latin typeface="Segoe UI"/>
                             </a:rPr>
-                            <a:t>Gold doc/fact fraction recovered</a:t>
+                            <a:t>Gold doc fraction recovered</a:t>
                           </a:r>
                         </a:p>
                       </a:txBody>
@@ -8891,7 +9777,7 @@
         </p:nvSpPr>
         <p:spPr>
           <a:xfrm>
-            <a:off x="822960" y="5803233"/>
+            <a:off x="4895427" y="443350"/>
             <a:ext cx="6796476" cy="400110"/>
           </a:xfrm>
           <a:prstGeom prst="rect">
@@ -9003,7 +9889,7 @@
           <a:p>
             <a:fld id="{C1FF6DA9-008F-8B48-92A6-B652298478BF}" type="slidenum">
               <a:rPr lang="en-US" smtClean="0"/>
-              <a:t>15</a:t>
+              <a:t>16</a:t>
             </a:fld>
             <a:endParaRPr lang="en-US"/>
           </a:p>
@@ -9017,7 +9903,7 @@
 </p:sld>
 </file>
 
-<file path=ppt/slides/slide16.xml><?xml version="1.0" encoding="utf-8"?>
+<file path=ppt/slides/slide17.xml><?xml version="1.0" encoding="utf-8"?>
 <p:sld xmlns:a="http://schemas.openxmlformats.org/drawingml/2006/main" xmlns:r="http://schemas.openxmlformats.org/officeDocument/2006/relationships" xmlns:p="http://schemas.openxmlformats.org/presentationml/2006/main">
   <p:cSld>
     <p:bg>
@@ -9736,7 +10622,7 @@
           <a:p>
             <a:fld id="{C1FF6DA9-008F-8B48-92A6-B652298478BF}" type="slidenum">
               <a:rPr lang="en-US" smtClean="0"/>
-              <a:t>16</a:t>
+              <a:t>17</a:t>
             </a:fld>
             <a:endParaRPr lang="en-US" dirty="0"/>
           </a:p>
@@ -9750,7 +10636,7 @@
 </p:sld>
 </file>
 
-<file path=ppt/slides/slide17.xml><?xml version="1.0" encoding="utf-8"?>
+<file path=ppt/slides/slide18.xml><?xml version="1.0" encoding="utf-8"?>
 <p:sld xmlns:a="http://schemas.openxmlformats.org/drawingml/2006/main" xmlns:r="http://schemas.openxmlformats.org/officeDocument/2006/relationships" xmlns:p="http://schemas.openxmlformats.org/presentationml/2006/main">
   <p:cSld>
     <p:spTree>
@@ -9963,7 +10849,7 @@
           <a:p>
             <a:fld id="{C1FF6DA9-008F-8B48-92A6-B652298478BF}" type="slidenum">
               <a:rPr lang="en-US" smtClean="0"/>
-              <a:t>17</a:t>
+              <a:t>18</a:t>
             </a:fld>
             <a:endParaRPr lang="en-US"/>
           </a:p>
@@ -9977,7 +10863,7 @@
 </p:sld>
 </file>
 
-<file path=ppt/slides/slide18.xml><?xml version="1.0" encoding="utf-8"?>
+<file path=ppt/slides/slide19.xml><?xml version="1.0" encoding="utf-8"?>
 <p:sld xmlns:a="http://schemas.openxmlformats.org/drawingml/2006/main" xmlns:r="http://schemas.openxmlformats.org/officeDocument/2006/relationships" xmlns:p="http://schemas.openxmlformats.org/presentationml/2006/main">
   <p:cSld>
     <p:spTree>
@@ -10219,7 +11105,7 @@
           <a:p>
             <a:fld id="{C1FF6DA9-008F-8B48-92A6-B652298478BF}" type="slidenum">
               <a:rPr lang="en-US" smtClean="0"/>
-              <a:t>18</a:t>
+              <a:t>19</a:t>
             </a:fld>
             <a:endParaRPr lang="en-US"/>
           </a:p>
@@ -10238,7 +11124,493 @@
 </p:sld>
 </file>
 
-<file path=ppt/slides/slide19.xml><?xml version="1.0" encoding="utf-8"?>
+<file path=ppt/slides/slide2.xml><?xml version="1.0" encoding="utf-8"?>
+<p:sld xmlns:a="http://schemas.openxmlformats.org/drawingml/2006/main" xmlns:r="http://schemas.openxmlformats.org/officeDocument/2006/relationships" xmlns:p="http://schemas.openxmlformats.org/presentationml/2006/main">
+  <p:cSld>
+    <p:spTree>
+      <p:nvGrpSpPr>
+        <p:cNvPr id="1" name=""/>
+        <p:cNvGrpSpPr/>
+        <p:nvPr/>
+      </p:nvGrpSpPr>
+      <p:grpSpPr>
+        <a:xfrm>
+          <a:off x="0" y="0"/>
+          <a:ext cx="0" cy="0"/>
+          <a:chOff x="0" y="0"/>
+          <a:chExt cx="0" cy="0"/>
+        </a:xfrm>
+      </p:grpSpPr>
+      <p:sp>
+        <p:nvSpPr>
+          <p:cNvPr id="2" name="Rectangle 1"/>
+          <p:cNvSpPr/>
+          <p:nvPr/>
+        </p:nvSpPr>
+        <p:spPr>
+          <a:xfrm>
+            <a:off x="305" y="0"/>
+            <a:ext cx="12191695" cy="6858000"/>
+          </a:xfrm>
+          <a:prstGeom prst="rect">
+            <a:avLst/>
+          </a:prstGeom>
+          <a:solidFill>
+            <a:srgbClr val="181C27"/>
+          </a:solidFill>
+          <a:ln>
+            <a:noFill/>
+          </a:ln>
+        </p:spPr>
+        <p:style>
+          <a:lnRef idx="1">
+            <a:schemeClr val="accent1"/>
+          </a:lnRef>
+          <a:fillRef idx="3">
+            <a:schemeClr val="accent1"/>
+          </a:fillRef>
+          <a:effectRef idx="2">
+            <a:schemeClr val="accent1"/>
+          </a:effectRef>
+          <a:fontRef idx="minor">
+            <a:schemeClr val="lt1"/>
+          </a:fontRef>
+        </p:style>
+        <p:txBody>
+          <a:bodyPr rtlCol="0" anchor="ctr"/>
+          <a:lstStyle/>
+          <a:p>
+            <a:pPr algn="ctr"/>
+            <a:endParaRPr/>
+          </a:p>
+        </p:txBody>
+      </p:sp>
+      <p:sp>
+        <p:nvSpPr>
+          <p:cNvPr id="3" name="Rectangle 2"/>
+          <p:cNvSpPr/>
+          <p:nvPr/>
+        </p:nvSpPr>
+        <p:spPr>
+          <a:xfrm>
+            <a:off x="0" y="0"/>
+            <a:ext cx="73152" cy="6858000"/>
+          </a:xfrm>
+          <a:prstGeom prst="rect">
+            <a:avLst/>
+          </a:prstGeom>
+          <a:solidFill>
+            <a:srgbClr val="4F8CFF"/>
+          </a:solidFill>
+          <a:ln>
+            <a:noFill/>
+          </a:ln>
+        </p:spPr>
+        <p:style>
+          <a:lnRef idx="1">
+            <a:schemeClr val="accent1"/>
+          </a:lnRef>
+          <a:fillRef idx="3">
+            <a:schemeClr val="accent1"/>
+          </a:fillRef>
+          <a:effectRef idx="2">
+            <a:schemeClr val="accent1"/>
+          </a:effectRef>
+          <a:fontRef idx="minor">
+            <a:schemeClr val="lt1"/>
+          </a:fontRef>
+        </p:style>
+        <p:txBody>
+          <a:bodyPr rtlCol="0" anchor="ctr"/>
+          <a:lstStyle/>
+          <a:p>
+            <a:pPr algn="ctr"/>
+            <a:endParaRPr/>
+          </a:p>
+        </p:txBody>
+      </p:sp>
+      <p:sp>
+        <p:nvSpPr>
+          <p:cNvPr id="4" name="TextBox 3"/>
+          <p:cNvSpPr txBox="1"/>
+          <p:nvPr/>
+        </p:nvSpPr>
+        <p:spPr>
+          <a:xfrm>
+            <a:off x="11338560" y="6400800"/>
+            <a:ext cx="731520" cy="365760"/>
+          </a:xfrm>
+          <a:prstGeom prst="rect">
+            <a:avLst/>
+          </a:prstGeom>
+          <a:noFill/>
+        </p:spPr>
+        <p:txBody>
+          <a:bodyPr wrap="none">
+            <a:spAutoFit/>
+          </a:bodyPr>
+          <a:lstStyle/>
+          <a:p>
+            <a:pPr algn="r"/>
+            <a:r>
+              <a:rPr sz="1100" b="0" i="0">
+                <a:solidFill>
+                  <a:srgbClr val="828796"/>
+                </a:solidFill>
+                <a:latin typeface="Segoe UI"/>
+              </a:rPr>
+              <a:t>2</a:t>
+            </a:r>
+          </a:p>
+        </p:txBody>
+      </p:sp>
+      <p:sp>
+        <p:nvSpPr>
+          <p:cNvPr id="5" name="TextBox 4"/>
+          <p:cNvSpPr txBox="1"/>
+          <p:nvPr/>
+        </p:nvSpPr>
+        <p:spPr>
+          <a:xfrm>
+            <a:off x="822960" y="411480"/>
+            <a:ext cx="10515600" cy="731520"/>
+          </a:xfrm>
+          <a:prstGeom prst="rect">
+            <a:avLst/>
+          </a:prstGeom>
+          <a:noFill/>
+        </p:spPr>
+        <p:txBody>
+          <a:bodyPr wrap="none">
+            <a:spAutoFit/>
+          </a:bodyPr>
+          <a:lstStyle/>
+          <a:p>
+            <a:r>
+              <a:rPr sz="3200" b="1" i="0">
+                <a:solidFill>
+                  <a:srgbClr val="F0F0F5"/>
+                </a:solidFill>
+                <a:latin typeface="Segoe UI"/>
+              </a:rPr>
+              <a:t>Outline</a:t>
+            </a:r>
+          </a:p>
+        </p:txBody>
+      </p:sp>
+      <p:sp>
+        <p:nvSpPr>
+          <p:cNvPr id="6" name="Rectangle 5"/>
+          <p:cNvSpPr/>
+          <p:nvPr/>
+        </p:nvSpPr>
+        <p:spPr>
+          <a:xfrm>
+            <a:off x="822960" y="1051560"/>
+            <a:ext cx="1371600" cy="38100"/>
+          </a:xfrm>
+          <a:prstGeom prst="rect">
+            <a:avLst/>
+          </a:prstGeom>
+          <a:solidFill>
+            <a:srgbClr val="4F8CFF"/>
+          </a:solidFill>
+          <a:ln>
+            <a:noFill/>
+          </a:ln>
+        </p:spPr>
+        <p:style>
+          <a:lnRef idx="1">
+            <a:schemeClr val="accent1"/>
+          </a:lnRef>
+          <a:fillRef idx="3">
+            <a:schemeClr val="accent1"/>
+          </a:fillRef>
+          <a:effectRef idx="2">
+            <a:schemeClr val="accent1"/>
+          </a:effectRef>
+          <a:fontRef idx="minor">
+            <a:schemeClr val="lt1"/>
+          </a:fontRef>
+        </p:style>
+        <p:txBody>
+          <a:bodyPr rtlCol="0" anchor="ctr"/>
+          <a:lstStyle/>
+          <a:p>
+            <a:pPr algn="ctr"/>
+            <a:endParaRPr/>
+          </a:p>
+        </p:txBody>
+      </p:sp>
+      <p:sp>
+        <p:nvSpPr>
+          <p:cNvPr id="7" name="TextBox 6"/>
+          <p:cNvSpPr txBox="1"/>
+          <p:nvPr/>
+        </p:nvSpPr>
+        <p:spPr>
+          <a:xfrm>
+            <a:off x="822960" y="1328500"/>
+            <a:ext cx="8948569" cy="4004109"/>
+          </a:xfrm>
+          <a:prstGeom prst="rect">
+            <a:avLst/>
+          </a:prstGeom>
+          <a:noFill/>
+        </p:spPr>
+        <p:txBody>
+          <a:bodyPr wrap="square">
+            <a:spAutoFit/>
+          </a:bodyPr>
+          <a:lstStyle/>
+          <a:p>
+            <a:pPr marL="457200" indent="-457200">
+              <a:lnSpc>
+                <a:spcPct val="150000"/>
+              </a:lnSpc>
+              <a:buFont typeface="+mj-lt"/>
+              <a:buAutoNum type="arabicPeriod"/>
+            </a:pPr>
+            <a:r>
+              <a:rPr lang="en-US" sz="2400" dirty="0">
+                <a:solidFill>
+                  <a:schemeClr val="bg1">
+                    <a:lumMod val="95000"/>
+                  </a:schemeClr>
+                </a:solidFill>
+                <a:latin typeface="Segoe UI"/>
+              </a:rPr>
+              <a:t>Why build a benchmark on medical data?</a:t>
+            </a:r>
+          </a:p>
+          <a:p>
+            <a:pPr marL="457200" indent="-457200">
+              <a:spcBef>
+                <a:spcPts val="1000"/>
+              </a:spcBef>
+              <a:spcAft>
+                <a:spcPts val="400"/>
+              </a:spcAft>
+              <a:buFont typeface="+mj-lt"/>
+              <a:buAutoNum type="arabicPeriod"/>
+            </a:pPr>
+            <a:r>
+              <a:rPr sz="2400" i="0" dirty="0">
+                <a:solidFill>
+                  <a:schemeClr val="bg1">
+                    <a:lumMod val="95000"/>
+                  </a:schemeClr>
+                </a:solidFill>
+                <a:latin typeface="Segoe UI"/>
+              </a:rPr>
+              <a:t>Ideal </a:t>
+            </a:r>
+            <a:r>
+              <a:rPr lang="en-US" sz="2400" dirty="0">
+                <a:solidFill>
+                  <a:schemeClr val="bg1">
+                    <a:lumMod val="95000"/>
+                  </a:schemeClr>
+                </a:solidFill>
+                <a:latin typeface="Segoe UI"/>
+              </a:rPr>
+              <a:t>d</a:t>
+            </a:r>
+            <a:r>
+              <a:rPr lang="en-US" sz="2400" i="0" dirty="0">
+                <a:solidFill>
+                  <a:schemeClr val="bg1">
+                    <a:lumMod val="95000"/>
+                  </a:schemeClr>
+                </a:solidFill>
+                <a:latin typeface="Segoe UI"/>
+              </a:rPr>
+              <a:t>ataset for diversity</a:t>
+            </a:r>
+          </a:p>
+          <a:p>
+            <a:pPr marL="457200" indent="-457200">
+              <a:spcBef>
+                <a:spcPts val="1000"/>
+              </a:spcBef>
+              <a:spcAft>
+                <a:spcPts val="400"/>
+              </a:spcAft>
+              <a:buFont typeface="+mj-lt"/>
+              <a:buAutoNum type="arabicPeriod"/>
+            </a:pPr>
+            <a:r>
+              <a:rPr lang="it-IT" sz="2400" dirty="0">
+                <a:solidFill>
+                  <a:schemeClr val="bg1">
+                    <a:lumMod val="95000"/>
+                  </a:schemeClr>
+                </a:solidFill>
+                <a:latin typeface="Segoe UI"/>
+              </a:rPr>
+              <a:t>Coverage: Facility-Location objective</a:t>
+            </a:r>
+            <a:endParaRPr sz="2400" i="0" dirty="0">
+              <a:solidFill>
+                <a:schemeClr val="bg1">
+                  <a:lumMod val="95000"/>
+                </a:schemeClr>
+              </a:solidFill>
+              <a:latin typeface="Segoe UI"/>
+            </a:endParaRPr>
+          </a:p>
+          <a:p>
+            <a:pPr marL="457200" indent="-457200">
+              <a:spcBef>
+                <a:spcPts val="1000"/>
+              </a:spcBef>
+              <a:spcAft>
+                <a:spcPts val="400"/>
+              </a:spcAft>
+              <a:buFont typeface="+mj-lt"/>
+              <a:buAutoNum type="arabicPeriod"/>
+            </a:pPr>
+            <a:r>
+              <a:rPr sz="2400" i="0" dirty="0">
+                <a:solidFill>
+                  <a:schemeClr val="bg1">
+                    <a:lumMod val="95000"/>
+                  </a:schemeClr>
+                </a:solidFill>
+                <a:latin typeface="Segoe UI"/>
+              </a:rPr>
+              <a:t>MIMIC-IV </a:t>
+            </a:r>
+            <a:r>
+              <a:rPr lang="en-US" sz="2400" i="0" dirty="0">
+                <a:solidFill>
+                  <a:schemeClr val="bg1">
+                    <a:lumMod val="95000"/>
+                  </a:schemeClr>
+                </a:solidFill>
+                <a:latin typeface="Segoe UI"/>
+              </a:rPr>
+              <a:t>d</a:t>
+            </a:r>
+            <a:r>
+              <a:rPr sz="2400" i="0" dirty="0">
+                <a:solidFill>
+                  <a:schemeClr val="bg1">
+                    <a:lumMod val="95000"/>
+                  </a:schemeClr>
+                </a:solidFill>
+                <a:latin typeface="Segoe UI"/>
+              </a:rPr>
+              <a:t>ataset</a:t>
+            </a:r>
+            <a:endParaRPr lang="en-US" sz="2400" i="0" dirty="0">
+              <a:solidFill>
+                <a:schemeClr val="bg1">
+                  <a:lumMod val="95000"/>
+                </a:schemeClr>
+              </a:solidFill>
+              <a:latin typeface="Segoe UI"/>
+            </a:endParaRPr>
+          </a:p>
+          <a:p>
+            <a:pPr marL="914400" lvl="1" indent="-457200">
+              <a:spcBef>
+                <a:spcPts val="1000"/>
+              </a:spcBef>
+              <a:spcAft>
+                <a:spcPts val="400"/>
+              </a:spcAft>
+              <a:buFont typeface="Wingdings" panose="05000000000000000000" pitchFamily="2" charset="2"/>
+              <a:buChar char="§"/>
+            </a:pPr>
+            <a:r>
+              <a:rPr lang="it-IT" sz="2400" dirty="0">
+                <a:solidFill>
+                  <a:schemeClr val="bg1">
+                    <a:lumMod val="95000"/>
+                  </a:schemeClr>
+                </a:solidFill>
+                <a:latin typeface="Segoe UI"/>
+              </a:rPr>
+              <a:t>Overview</a:t>
+            </a:r>
+            <a:endParaRPr lang="en-US" sz="2400" i="0" dirty="0">
+              <a:solidFill>
+                <a:schemeClr val="bg1">
+                  <a:lumMod val="95000"/>
+                </a:schemeClr>
+              </a:solidFill>
+              <a:latin typeface="Segoe UI"/>
+            </a:endParaRPr>
+          </a:p>
+          <a:p>
+            <a:pPr marL="914400" lvl="1" indent="-457200">
+              <a:spcBef>
+                <a:spcPts val="1000"/>
+              </a:spcBef>
+              <a:spcAft>
+                <a:spcPts val="400"/>
+              </a:spcAft>
+              <a:buFont typeface="Wingdings" panose="05000000000000000000" pitchFamily="2" charset="2"/>
+              <a:buChar char="§"/>
+            </a:pPr>
+            <a:r>
+              <a:rPr lang="it-IT" sz="2400" i="0" dirty="0">
+                <a:solidFill>
+                  <a:schemeClr val="bg1">
+                    <a:lumMod val="95000"/>
+                  </a:schemeClr>
+                </a:solidFill>
+                <a:latin typeface="Segoe UI"/>
+              </a:rPr>
+              <a:t>Motivations for coverage suitability</a:t>
+            </a:r>
+          </a:p>
+          <a:p>
+            <a:pPr marL="457200" indent="-457200">
+              <a:lnSpc>
+                <a:spcPct val="150000"/>
+              </a:lnSpc>
+              <a:spcBef>
+                <a:spcPts val="1000"/>
+              </a:spcBef>
+              <a:spcAft>
+                <a:spcPts val="400"/>
+              </a:spcAft>
+              <a:buFont typeface="+mj-lt"/>
+              <a:buAutoNum type="arabicPeriod"/>
+            </a:pPr>
+            <a:r>
+              <a:rPr lang="en-US" sz="2400" i="0" dirty="0">
+                <a:solidFill>
+                  <a:schemeClr val="bg1">
+                    <a:lumMod val="95000"/>
+                  </a:schemeClr>
+                </a:solidFill>
+                <a:latin typeface="Segoe UI"/>
+              </a:rPr>
+              <a:t>Experimental pipeline for building QA benchmark</a:t>
+            </a:r>
+            <a:endParaRPr sz="2400" i="0" dirty="0">
+              <a:solidFill>
+                <a:schemeClr val="bg1">
+                  <a:lumMod val="95000"/>
+                </a:schemeClr>
+              </a:solidFill>
+              <a:latin typeface="Segoe UI"/>
+            </a:endParaRPr>
+          </a:p>
+        </p:txBody>
+      </p:sp>
+    </p:spTree>
+  </p:cSld>
+  <p:clrMapOvr>
+    <a:masterClrMapping/>
+  </p:clrMapOvr>
+</p:sld>
+</file>
+
+<file path=ppt/slides/slide20.xml><?xml version="1.0" encoding="utf-8"?>
 <p:sld xmlns:a="http://schemas.openxmlformats.org/drawingml/2006/main" xmlns:r="http://schemas.openxmlformats.org/officeDocument/2006/relationships" xmlns:p="http://schemas.openxmlformats.org/presentationml/2006/main">
   <p:cSld>
     <p:spTree>
@@ -11072,7 +12444,7 @@
           <a:p>
             <a:fld id="{C1FF6DA9-008F-8B48-92A6-B652298478BF}" type="slidenum">
               <a:rPr lang="en-US" smtClean="0"/>
-              <a:t>19</a:t>
+              <a:t>20</a:t>
             </a:fld>
             <a:endParaRPr lang="en-US"/>
           </a:p>
@@ -11086,493 +12458,7 @@
 </p:sld>
 </file>
 
-<file path=ppt/slides/slide2.xml><?xml version="1.0" encoding="utf-8"?>
-<p:sld xmlns:a="http://schemas.openxmlformats.org/drawingml/2006/main" xmlns:r="http://schemas.openxmlformats.org/officeDocument/2006/relationships" xmlns:p="http://schemas.openxmlformats.org/presentationml/2006/main">
-  <p:cSld>
-    <p:spTree>
-      <p:nvGrpSpPr>
-        <p:cNvPr id="1" name=""/>
-        <p:cNvGrpSpPr/>
-        <p:nvPr/>
-      </p:nvGrpSpPr>
-      <p:grpSpPr>
-        <a:xfrm>
-          <a:off x="0" y="0"/>
-          <a:ext cx="0" cy="0"/>
-          <a:chOff x="0" y="0"/>
-          <a:chExt cx="0" cy="0"/>
-        </a:xfrm>
-      </p:grpSpPr>
-      <p:sp>
-        <p:nvSpPr>
-          <p:cNvPr id="2" name="Rectangle 1"/>
-          <p:cNvSpPr/>
-          <p:nvPr/>
-        </p:nvSpPr>
-        <p:spPr>
-          <a:xfrm>
-            <a:off x="305" y="0"/>
-            <a:ext cx="12191695" cy="6858000"/>
-          </a:xfrm>
-          <a:prstGeom prst="rect">
-            <a:avLst/>
-          </a:prstGeom>
-          <a:solidFill>
-            <a:srgbClr val="181C27"/>
-          </a:solidFill>
-          <a:ln>
-            <a:noFill/>
-          </a:ln>
-        </p:spPr>
-        <p:style>
-          <a:lnRef idx="1">
-            <a:schemeClr val="accent1"/>
-          </a:lnRef>
-          <a:fillRef idx="3">
-            <a:schemeClr val="accent1"/>
-          </a:fillRef>
-          <a:effectRef idx="2">
-            <a:schemeClr val="accent1"/>
-          </a:effectRef>
-          <a:fontRef idx="minor">
-            <a:schemeClr val="lt1"/>
-          </a:fontRef>
-        </p:style>
-        <p:txBody>
-          <a:bodyPr rtlCol="0" anchor="ctr"/>
-          <a:lstStyle/>
-          <a:p>
-            <a:pPr algn="ctr"/>
-            <a:endParaRPr/>
-          </a:p>
-        </p:txBody>
-      </p:sp>
-      <p:sp>
-        <p:nvSpPr>
-          <p:cNvPr id="3" name="Rectangle 2"/>
-          <p:cNvSpPr/>
-          <p:nvPr/>
-        </p:nvSpPr>
-        <p:spPr>
-          <a:xfrm>
-            <a:off x="0" y="0"/>
-            <a:ext cx="73152" cy="6858000"/>
-          </a:xfrm>
-          <a:prstGeom prst="rect">
-            <a:avLst/>
-          </a:prstGeom>
-          <a:solidFill>
-            <a:srgbClr val="4F8CFF"/>
-          </a:solidFill>
-          <a:ln>
-            <a:noFill/>
-          </a:ln>
-        </p:spPr>
-        <p:style>
-          <a:lnRef idx="1">
-            <a:schemeClr val="accent1"/>
-          </a:lnRef>
-          <a:fillRef idx="3">
-            <a:schemeClr val="accent1"/>
-          </a:fillRef>
-          <a:effectRef idx="2">
-            <a:schemeClr val="accent1"/>
-          </a:effectRef>
-          <a:fontRef idx="minor">
-            <a:schemeClr val="lt1"/>
-          </a:fontRef>
-        </p:style>
-        <p:txBody>
-          <a:bodyPr rtlCol="0" anchor="ctr"/>
-          <a:lstStyle/>
-          <a:p>
-            <a:pPr algn="ctr"/>
-            <a:endParaRPr/>
-          </a:p>
-        </p:txBody>
-      </p:sp>
-      <p:sp>
-        <p:nvSpPr>
-          <p:cNvPr id="4" name="TextBox 3"/>
-          <p:cNvSpPr txBox="1"/>
-          <p:nvPr/>
-        </p:nvSpPr>
-        <p:spPr>
-          <a:xfrm>
-            <a:off x="11338560" y="6400800"/>
-            <a:ext cx="731520" cy="365760"/>
-          </a:xfrm>
-          <a:prstGeom prst="rect">
-            <a:avLst/>
-          </a:prstGeom>
-          <a:noFill/>
-        </p:spPr>
-        <p:txBody>
-          <a:bodyPr wrap="none">
-            <a:spAutoFit/>
-          </a:bodyPr>
-          <a:lstStyle/>
-          <a:p>
-            <a:pPr algn="r"/>
-            <a:r>
-              <a:rPr sz="1100" b="0" i="0">
-                <a:solidFill>
-                  <a:srgbClr val="828796"/>
-                </a:solidFill>
-                <a:latin typeface="Segoe UI"/>
-              </a:rPr>
-              <a:t>2</a:t>
-            </a:r>
-          </a:p>
-        </p:txBody>
-      </p:sp>
-      <p:sp>
-        <p:nvSpPr>
-          <p:cNvPr id="5" name="TextBox 4"/>
-          <p:cNvSpPr txBox="1"/>
-          <p:nvPr/>
-        </p:nvSpPr>
-        <p:spPr>
-          <a:xfrm>
-            <a:off x="822960" y="411480"/>
-            <a:ext cx="10515600" cy="731520"/>
-          </a:xfrm>
-          <a:prstGeom prst="rect">
-            <a:avLst/>
-          </a:prstGeom>
-          <a:noFill/>
-        </p:spPr>
-        <p:txBody>
-          <a:bodyPr wrap="none">
-            <a:spAutoFit/>
-          </a:bodyPr>
-          <a:lstStyle/>
-          <a:p>
-            <a:r>
-              <a:rPr sz="3200" b="1" i="0">
-                <a:solidFill>
-                  <a:srgbClr val="F0F0F5"/>
-                </a:solidFill>
-                <a:latin typeface="Segoe UI"/>
-              </a:rPr>
-              <a:t>Outline</a:t>
-            </a:r>
-          </a:p>
-        </p:txBody>
-      </p:sp>
-      <p:sp>
-        <p:nvSpPr>
-          <p:cNvPr id="6" name="Rectangle 5"/>
-          <p:cNvSpPr/>
-          <p:nvPr/>
-        </p:nvSpPr>
-        <p:spPr>
-          <a:xfrm>
-            <a:off x="822960" y="1051560"/>
-            <a:ext cx="1371600" cy="38100"/>
-          </a:xfrm>
-          <a:prstGeom prst="rect">
-            <a:avLst/>
-          </a:prstGeom>
-          <a:solidFill>
-            <a:srgbClr val="4F8CFF"/>
-          </a:solidFill>
-          <a:ln>
-            <a:noFill/>
-          </a:ln>
-        </p:spPr>
-        <p:style>
-          <a:lnRef idx="1">
-            <a:schemeClr val="accent1"/>
-          </a:lnRef>
-          <a:fillRef idx="3">
-            <a:schemeClr val="accent1"/>
-          </a:fillRef>
-          <a:effectRef idx="2">
-            <a:schemeClr val="accent1"/>
-          </a:effectRef>
-          <a:fontRef idx="minor">
-            <a:schemeClr val="lt1"/>
-          </a:fontRef>
-        </p:style>
-        <p:txBody>
-          <a:bodyPr rtlCol="0" anchor="ctr"/>
-          <a:lstStyle/>
-          <a:p>
-            <a:pPr algn="ctr"/>
-            <a:endParaRPr/>
-          </a:p>
-        </p:txBody>
-      </p:sp>
-      <p:sp>
-        <p:nvSpPr>
-          <p:cNvPr id="7" name="TextBox 6"/>
-          <p:cNvSpPr txBox="1"/>
-          <p:nvPr/>
-        </p:nvSpPr>
-        <p:spPr>
-          <a:xfrm>
-            <a:off x="822960" y="1328500"/>
-            <a:ext cx="8948569" cy="4004109"/>
-          </a:xfrm>
-          <a:prstGeom prst="rect">
-            <a:avLst/>
-          </a:prstGeom>
-          <a:noFill/>
-        </p:spPr>
-        <p:txBody>
-          <a:bodyPr wrap="square">
-            <a:spAutoFit/>
-          </a:bodyPr>
-          <a:lstStyle/>
-          <a:p>
-            <a:pPr marL="457200" indent="-457200">
-              <a:lnSpc>
-                <a:spcPct val="150000"/>
-              </a:lnSpc>
-              <a:buFont typeface="+mj-lt"/>
-              <a:buAutoNum type="arabicPeriod"/>
-            </a:pPr>
-            <a:r>
-              <a:rPr lang="en-US" sz="2400" dirty="0">
-                <a:solidFill>
-                  <a:schemeClr val="bg1">
-                    <a:lumMod val="95000"/>
-                  </a:schemeClr>
-                </a:solidFill>
-                <a:latin typeface="Segoe UI"/>
-              </a:rPr>
-              <a:t>Why build a benchmark on medical data?</a:t>
-            </a:r>
-          </a:p>
-          <a:p>
-            <a:pPr marL="457200" indent="-457200">
-              <a:spcBef>
-                <a:spcPts val="1000"/>
-              </a:spcBef>
-              <a:spcAft>
-                <a:spcPts val="400"/>
-              </a:spcAft>
-              <a:buFont typeface="+mj-lt"/>
-              <a:buAutoNum type="arabicPeriod"/>
-            </a:pPr>
-            <a:r>
-              <a:rPr sz="2400" i="0" dirty="0">
-                <a:solidFill>
-                  <a:schemeClr val="bg1">
-                    <a:lumMod val="95000"/>
-                  </a:schemeClr>
-                </a:solidFill>
-                <a:latin typeface="Segoe UI"/>
-              </a:rPr>
-              <a:t>Ideal </a:t>
-            </a:r>
-            <a:r>
-              <a:rPr lang="en-US" sz="2400" dirty="0">
-                <a:solidFill>
-                  <a:schemeClr val="bg1">
-                    <a:lumMod val="95000"/>
-                  </a:schemeClr>
-                </a:solidFill>
-                <a:latin typeface="Segoe UI"/>
-              </a:rPr>
-              <a:t>d</a:t>
-            </a:r>
-            <a:r>
-              <a:rPr lang="en-US" sz="2400" i="0" dirty="0">
-                <a:solidFill>
-                  <a:schemeClr val="bg1">
-                    <a:lumMod val="95000"/>
-                  </a:schemeClr>
-                </a:solidFill>
-                <a:latin typeface="Segoe UI"/>
-              </a:rPr>
-              <a:t>ataset for diversity</a:t>
-            </a:r>
-          </a:p>
-          <a:p>
-            <a:pPr marL="457200" indent="-457200">
-              <a:spcBef>
-                <a:spcPts val="1000"/>
-              </a:spcBef>
-              <a:spcAft>
-                <a:spcPts val="400"/>
-              </a:spcAft>
-              <a:buFont typeface="+mj-lt"/>
-              <a:buAutoNum type="arabicPeriod"/>
-            </a:pPr>
-            <a:r>
-              <a:rPr lang="it-IT" sz="2400" dirty="0">
-                <a:solidFill>
-                  <a:schemeClr val="bg1">
-                    <a:lumMod val="95000"/>
-                  </a:schemeClr>
-                </a:solidFill>
-                <a:latin typeface="Segoe UI"/>
-              </a:rPr>
-              <a:t>Coverage: Facility-Location objective</a:t>
-            </a:r>
-            <a:endParaRPr sz="2400" i="0" dirty="0">
-              <a:solidFill>
-                <a:schemeClr val="bg1">
-                  <a:lumMod val="95000"/>
-                </a:schemeClr>
-              </a:solidFill>
-              <a:latin typeface="Segoe UI"/>
-            </a:endParaRPr>
-          </a:p>
-          <a:p>
-            <a:pPr marL="457200" indent="-457200">
-              <a:spcBef>
-                <a:spcPts val="1000"/>
-              </a:spcBef>
-              <a:spcAft>
-                <a:spcPts val="400"/>
-              </a:spcAft>
-              <a:buFont typeface="+mj-lt"/>
-              <a:buAutoNum type="arabicPeriod"/>
-            </a:pPr>
-            <a:r>
-              <a:rPr sz="2400" i="0" dirty="0">
-                <a:solidFill>
-                  <a:schemeClr val="bg1">
-                    <a:lumMod val="95000"/>
-                  </a:schemeClr>
-                </a:solidFill>
-                <a:latin typeface="Segoe UI"/>
-              </a:rPr>
-              <a:t>MIMIC-IV </a:t>
-            </a:r>
-            <a:r>
-              <a:rPr lang="en-US" sz="2400" i="0" dirty="0">
-                <a:solidFill>
-                  <a:schemeClr val="bg1">
-                    <a:lumMod val="95000"/>
-                  </a:schemeClr>
-                </a:solidFill>
-                <a:latin typeface="Segoe UI"/>
-              </a:rPr>
-              <a:t>d</a:t>
-            </a:r>
-            <a:r>
-              <a:rPr sz="2400" i="0" dirty="0">
-                <a:solidFill>
-                  <a:schemeClr val="bg1">
-                    <a:lumMod val="95000"/>
-                  </a:schemeClr>
-                </a:solidFill>
-                <a:latin typeface="Segoe UI"/>
-              </a:rPr>
-              <a:t>ataset</a:t>
-            </a:r>
-            <a:endParaRPr lang="en-US" sz="2400" i="0" dirty="0">
-              <a:solidFill>
-                <a:schemeClr val="bg1">
-                  <a:lumMod val="95000"/>
-                </a:schemeClr>
-              </a:solidFill>
-              <a:latin typeface="Segoe UI"/>
-            </a:endParaRPr>
-          </a:p>
-          <a:p>
-            <a:pPr marL="914400" lvl="1" indent="-457200">
-              <a:spcBef>
-                <a:spcPts val="1000"/>
-              </a:spcBef>
-              <a:spcAft>
-                <a:spcPts val="400"/>
-              </a:spcAft>
-              <a:buFont typeface="Wingdings" panose="05000000000000000000" pitchFamily="2" charset="2"/>
-              <a:buChar char="§"/>
-            </a:pPr>
-            <a:r>
-              <a:rPr lang="it-IT" sz="2400" dirty="0">
-                <a:solidFill>
-                  <a:schemeClr val="bg1">
-                    <a:lumMod val="95000"/>
-                  </a:schemeClr>
-                </a:solidFill>
-                <a:latin typeface="Segoe UI"/>
-              </a:rPr>
-              <a:t>Overview</a:t>
-            </a:r>
-            <a:endParaRPr lang="en-US" sz="2400" i="0" dirty="0">
-              <a:solidFill>
-                <a:schemeClr val="bg1">
-                  <a:lumMod val="95000"/>
-                </a:schemeClr>
-              </a:solidFill>
-              <a:latin typeface="Segoe UI"/>
-            </a:endParaRPr>
-          </a:p>
-          <a:p>
-            <a:pPr marL="914400" lvl="1" indent="-457200">
-              <a:spcBef>
-                <a:spcPts val="1000"/>
-              </a:spcBef>
-              <a:spcAft>
-                <a:spcPts val="400"/>
-              </a:spcAft>
-              <a:buFont typeface="Wingdings" panose="05000000000000000000" pitchFamily="2" charset="2"/>
-              <a:buChar char="§"/>
-            </a:pPr>
-            <a:r>
-              <a:rPr lang="it-IT" sz="2400" i="0" dirty="0">
-                <a:solidFill>
-                  <a:schemeClr val="bg1">
-                    <a:lumMod val="95000"/>
-                  </a:schemeClr>
-                </a:solidFill>
-                <a:latin typeface="Segoe UI"/>
-              </a:rPr>
-              <a:t>Motivations for coverage suitability</a:t>
-            </a:r>
-          </a:p>
-          <a:p>
-            <a:pPr marL="457200" indent="-457200">
-              <a:lnSpc>
-                <a:spcPct val="150000"/>
-              </a:lnSpc>
-              <a:spcBef>
-                <a:spcPts val="1000"/>
-              </a:spcBef>
-              <a:spcAft>
-                <a:spcPts val="400"/>
-              </a:spcAft>
-              <a:buFont typeface="+mj-lt"/>
-              <a:buAutoNum type="arabicPeriod"/>
-            </a:pPr>
-            <a:r>
-              <a:rPr lang="en-US" sz="2400" i="0" dirty="0">
-                <a:solidFill>
-                  <a:schemeClr val="bg1">
-                    <a:lumMod val="95000"/>
-                  </a:schemeClr>
-                </a:solidFill>
-                <a:latin typeface="Segoe UI"/>
-              </a:rPr>
-              <a:t>Experimental pipeline for building QA benchmark</a:t>
-            </a:r>
-            <a:endParaRPr sz="2400" i="0" dirty="0">
-              <a:solidFill>
-                <a:schemeClr val="bg1">
-                  <a:lumMod val="95000"/>
-                </a:schemeClr>
-              </a:solidFill>
-              <a:latin typeface="Segoe UI"/>
-            </a:endParaRPr>
-          </a:p>
-        </p:txBody>
-      </p:sp>
-    </p:spTree>
-  </p:cSld>
-  <p:clrMapOvr>
-    <a:masterClrMapping/>
-  </p:clrMapOvr>
-</p:sld>
-</file>
-
-<file path=ppt/slides/slide20.xml><?xml version="1.0" encoding="utf-8"?>
+<file path=ppt/slides/slide21.xml><?xml version="1.0" encoding="utf-8"?>
 <p:sld xmlns:a="http://schemas.openxmlformats.org/drawingml/2006/main" xmlns:r="http://schemas.openxmlformats.org/officeDocument/2006/relationships" xmlns:p="http://schemas.openxmlformats.org/presentationml/2006/main">
   <p:cSld>
     <p:spTree>
@@ -12197,7 +13083,7 @@
           <a:p>
             <a:fld id="{C1FF6DA9-008F-8B48-92A6-B652298478BF}" type="slidenum">
               <a:rPr lang="en-US" smtClean="0"/>
-              <a:t>20</a:t>
+              <a:t>21</a:t>
             </a:fld>
             <a:endParaRPr lang="en-US"/>
           </a:p>
@@ -12311,7 +13197,7 @@
 </p:sld>
 </file>
 
-<file path=ppt/slides/slide21.xml><?xml version="1.0" encoding="utf-8"?>
+<file path=ppt/slides/slide22.xml><?xml version="1.0" encoding="utf-8"?>
 <p:sld xmlns:a="http://schemas.openxmlformats.org/drawingml/2006/main" xmlns:r="http://schemas.openxmlformats.org/officeDocument/2006/relationships" xmlns:p="http://schemas.openxmlformats.org/presentationml/2006/main">
   <p:cSld>
     <p:spTree>
@@ -12956,7 +13842,7 @@
           <a:p>
             <a:fld id="{C1FF6DA9-008F-8B48-92A6-B652298478BF}" type="slidenum">
               <a:rPr lang="en-US" smtClean="0"/>
-              <a:t>21</a:t>
+              <a:t>22</a:t>
             </a:fld>
             <a:endParaRPr lang="en-US"/>
           </a:p>
@@ -12970,7 +13856,7 @@
 </p:sld>
 </file>
 
-<file path=ppt/slides/slide22.xml><?xml version="1.0" encoding="utf-8"?>
+<file path=ppt/slides/slide23.xml><?xml version="1.0" encoding="utf-8"?>
 <p:sld xmlns:a="http://schemas.openxmlformats.org/drawingml/2006/main" xmlns:r="http://schemas.openxmlformats.org/officeDocument/2006/relationships" xmlns:p="http://schemas.openxmlformats.org/presentationml/2006/main">
   <p:cSld>
     <p:spTree>
@@ -13456,7 +14342,7 @@
           <a:p>
             <a:fld id="{C1FF6DA9-008F-8B48-92A6-B652298478BF}" type="slidenum">
               <a:rPr lang="en-US" smtClean="0"/>
-              <a:t>22</a:t>
+              <a:t>23</a:t>
             </a:fld>
             <a:endParaRPr lang="en-US"/>
           </a:p>
@@ -13470,7 +14356,7 @@
 </p:sld>
 </file>
 
-<file path=ppt/slides/slide23.xml><?xml version="1.0" encoding="utf-8"?>
+<file path=ppt/slides/slide24.xml><?xml version="1.0" encoding="utf-8"?>
 <p:sld xmlns:a="http://schemas.openxmlformats.org/drawingml/2006/main" xmlns:r="http://schemas.openxmlformats.org/officeDocument/2006/relationships" xmlns:p="http://schemas.openxmlformats.org/presentationml/2006/main">
   <p:cSld>
     <p:spTree>
@@ -13897,7 +14783,7 @@
           <a:p>
             <a:fld id="{C1FF6DA9-008F-8B48-92A6-B652298478BF}" type="slidenum">
               <a:rPr lang="en-US" smtClean="0"/>
-              <a:t>23</a:t>
+              <a:t>24</a:t>
             </a:fld>
             <a:endParaRPr lang="en-US"/>
           </a:p>
@@ -13911,7 +14797,7 @@
 </p:sld>
 </file>
 
-<file path=ppt/slides/slide24.xml><?xml version="1.0" encoding="utf-8"?>
+<file path=ppt/slides/slide25.xml><?xml version="1.0" encoding="utf-8"?>
 <p:sld xmlns:a="http://schemas.openxmlformats.org/drawingml/2006/main" xmlns:r="http://schemas.openxmlformats.org/officeDocument/2006/relationships" xmlns:p="http://schemas.openxmlformats.org/presentationml/2006/main">
   <p:cSld>
     <p:spTree>
@@ -14579,7 +15465,7 @@
           <a:p>
             <a:fld id="{C1FF6DA9-008F-8B48-92A6-B652298478BF}" type="slidenum">
               <a:rPr lang="en-US" smtClean="0"/>
-              <a:t>24</a:t>
+              <a:t>25</a:t>
             </a:fld>
             <a:endParaRPr lang="en-US"/>
           </a:p>

--- a/docs/mimic-feasibility-analysis.pptx
+++ b/docs/mimic-feasibility-analysis.pptx
@@ -5552,7 +5552,7 @@
         <p:spPr>
           <a:xfrm>
             <a:off x="822960" y="1645920"/>
-            <a:ext cx="5181600" cy="2298065"/>
+            <a:ext cx="10657840" cy="1374735"/>
           </a:xfrm>
           <a:prstGeom prst="rect">
             <a:avLst/>
@@ -5697,8 +5697,8 @@
         </p:nvSpPr>
         <p:spPr>
           <a:xfrm>
-            <a:off x="6187442" y="1514014"/>
-            <a:ext cx="5364480" cy="2389331"/>
+            <a:off x="838199" y="3493836"/>
+            <a:ext cx="6265333" cy="2389331"/>
           </a:xfrm>
           <a:prstGeom prst="roundRect">
             <a:avLst>
@@ -5868,184 +5868,6 @@
               <a:latin typeface="JetBrains Mono" panose="02000009000000000000" pitchFamily="49" charset="0"/>
               <a:ea typeface="JetBrains Mono" panose="02000009000000000000" pitchFamily="49" charset="0"/>
               <a:cs typeface="JetBrains Mono" panose="02000009000000000000" pitchFamily="49" charset="0"/>
-            </a:endParaRPr>
-          </a:p>
-        </p:txBody>
-      </p:sp>
-      <p:sp>
-        <p:nvSpPr>
-          <p:cNvPr id="8" name="TextBox 7">
-            <a:extLst>
-              <a:ext uri="{FF2B5EF4-FFF2-40B4-BE49-F238E27FC236}">
-                <a16:creationId xmlns:a16="http://schemas.microsoft.com/office/drawing/2014/main" id="{13790909-FA82-7256-3A87-F37C338AD234}"/>
-              </a:ext>
-            </a:extLst>
-          </p:cNvPr>
-          <p:cNvSpPr txBox="1"/>
-          <p:nvPr/>
-        </p:nvSpPr>
-        <p:spPr>
-          <a:xfrm>
-            <a:off x="822960" y="4687064"/>
-            <a:ext cx="9966960" cy="1990288"/>
-          </a:xfrm>
-          <a:prstGeom prst="rect">
-            <a:avLst/>
-          </a:prstGeom>
-          <a:noFill/>
-        </p:spPr>
-        <p:txBody>
-          <a:bodyPr wrap="square">
-            <a:spAutoFit/>
-          </a:bodyPr>
-          <a:lstStyle/>
-          <a:p>
-            <a:pPr>
-              <a:spcBef>
-                <a:spcPts val="1000"/>
-              </a:spcBef>
-              <a:spcAft>
-                <a:spcPts val="400"/>
-              </a:spcAft>
-            </a:pPr>
-            <a:r>
-              <a:rPr sz="2000" b="0" i="0" dirty="0">
-                <a:solidFill>
-                  <a:srgbClr val="4F8CFF"/>
-                </a:solidFill>
-                <a:latin typeface="Segoe UI"/>
-              </a:rPr>
-              <a:t>▸  </a:t>
-            </a:r>
-            <a:r>
-              <a:rPr lang="en-US" sz="2000" b="0" i="0" dirty="0">
-                <a:solidFill>
-                  <a:srgbClr val="F0F0F5"/>
-                </a:solidFill>
-                <a:latin typeface="Segoe UI"/>
-              </a:rPr>
-              <a:t>Alternative: </a:t>
-            </a:r>
-            <a:r>
-              <a:rPr lang="en-US" sz="2000" b="1" i="0" dirty="0">
-                <a:solidFill>
-                  <a:srgbClr val="F0F0F5"/>
-                </a:solidFill>
-                <a:latin typeface="Segoe UI"/>
-              </a:rPr>
-              <a:t>whole-document embeddings</a:t>
-            </a:r>
-            <a:r>
-              <a:rPr lang="en-US" sz="2000" b="0" i="0" dirty="0">
-                <a:solidFill>
-                  <a:srgbClr val="F0F0F5"/>
-                </a:solidFill>
-                <a:latin typeface="Segoe UI"/>
-              </a:rPr>
-              <a:t> via long-context embedding models</a:t>
-            </a:r>
-            <a:r>
-              <a:rPr lang="en-US" sz="2000" dirty="0">
-                <a:solidFill>
-                  <a:srgbClr val="F0F0F5"/>
-                </a:solidFill>
-                <a:latin typeface="Segoe UI"/>
-              </a:rPr>
-              <a:t>, d</a:t>
-            </a:r>
-            <a:r>
-              <a:rPr lang="it-IT" sz="2000" dirty="0">
-                <a:solidFill>
-                  <a:schemeClr val="bg1"/>
-                </a:solidFill>
-                <a:latin typeface="Segoe UI"/>
-              </a:rPr>
-              <a:t>epending on which kind of queries we want to construct</a:t>
-            </a:r>
-          </a:p>
-          <a:p>
-            <a:pPr marL="742950" lvl="1" indent="-285750">
-              <a:spcBef>
-                <a:spcPts val="1000"/>
-              </a:spcBef>
-              <a:spcAft>
-                <a:spcPts val="400"/>
-              </a:spcAft>
-              <a:buFont typeface="Wingdings" panose="05000000000000000000" pitchFamily="2" charset="2"/>
-              <a:buChar char="§"/>
-            </a:pPr>
-            <a:r>
-              <a:rPr lang="en-US" sz="2000" dirty="0">
-                <a:solidFill>
-                  <a:schemeClr val="bg1">
-                    <a:lumMod val="75000"/>
-                  </a:schemeClr>
-                </a:solidFill>
-                <a:latin typeface="Segoe UI"/>
-              </a:rPr>
-              <a:t>“</a:t>
-            </a:r>
-            <a:r>
-              <a:rPr lang="en-US" sz="2000" i="1" dirty="0">
-                <a:solidFill>
-                  <a:schemeClr val="bg1">
-                    <a:lumMod val="75000"/>
-                  </a:schemeClr>
-                </a:solidFill>
-                <a:latin typeface="Segoe UI"/>
-              </a:rPr>
-              <a:t>find patients similar to this case</a:t>
-            </a:r>
-            <a:r>
-              <a:rPr lang="en-US" sz="2000" dirty="0">
-                <a:solidFill>
-                  <a:schemeClr val="bg1">
-                    <a:lumMod val="75000"/>
-                  </a:schemeClr>
-                </a:solidFill>
-                <a:latin typeface="Segoe UI"/>
-              </a:rPr>
-              <a:t>” rather than “</a:t>
-            </a:r>
-            <a:r>
-              <a:rPr lang="en-US" sz="2000" i="1" dirty="0">
-                <a:solidFill>
-                  <a:schemeClr val="bg1">
-                    <a:lumMod val="75000"/>
-                  </a:schemeClr>
-                </a:solidFill>
-                <a:latin typeface="Segoe UI"/>
-              </a:rPr>
-              <a:t>what are the symptoms of X and how 	do they differ with Y</a:t>
-            </a:r>
-            <a:r>
-              <a:rPr lang="en-US" sz="2000" dirty="0">
-                <a:solidFill>
-                  <a:schemeClr val="bg1">
-                    <a:lumMod val="75000"/>
-                  </a:schemeClr>
-                </a:solidFill>
-                <a:latin typeface="Segoe UI"/>
-              </a:rPr>
-              <a:t>”</a:t>
-            </a:r>
-          </a:p>
-          <a:p>
-            <a:pPr>
-              <a:spcBef>
-                <a:spcPts val="1000"/>
-              </a:spcBef>
-              <a:spcAft>
-                <a:spcPts val="400"/>
-              </a:spcAft>
-            </a:pPr>
-            <a:endParaRPr lang="it-IT" sz="2000" dirty="0">
-              <a:solidFill>
-                <a:schemeClr val="bg1">
-                  <a:lumMod val="75000"/>
-                </a:schemeClr>
-              </a:solidFill>
-              <a:latin typeface="Segoe UI"/>
             </a:endParaRPr>
           </a:p>
         </p:txBody>
@@ -7513,33 +7335,7 @@
                 <a:ea typeface="JetBrains Mono" panose="02000009000000000000" pitchFamily="49" charset="0"/>
                 <a:cs typeface="JetBrains Mono" panose="02000009000000000000" pitchFamily="49" charset="0"/>
               </a:rPr>
-              <a:t>		"chunk_ids": [</a:t>
-            </a:r>
-            <a:r>
-              <a:rPr lang="en-US" sz="1250">
-                <a:solidFill>
-                  <a:schemeClr val="bg1">
-                    <a:lumMod val="85000"/>
-                  </a:schemeClr>
-                </a:solidFill>
-                <a:latin typeface="JetBrains Mono" panose="02000009000000000000" pitchFamily="49" charset="0"/>
-                <a:ea typeface="JetBrains Mono" panose="02000009000000000000" pitchFamily="49" charset="0"/>
-                <a:cs typeface="JetBrains Mono" panose="02000009000000000000" pitchFamily="49" charset="0"/>
-              </a:rPr>
-              <a:t>	50962, 101542, 32657… </a:t>
-            </a:r>
-            <a:r>
-              <a:rPr lang="en-US" sz="1250" dirty="0">
-                <a:solidFill>
-                  <a:schemeClr val="bg1">
-                    <a:lumMod val="85000"/>
-                  </a:schemeClr>
-                </a:solidFill>
-                <a:latin typeface="JetBrains Mono" panose="02000009000000000000" pitchFamily="49" charset="0"/>
-                <a:ea typeface="JetBrains Mono" panose="02000009000000000000" pitchFamily="49" charset="0"/>
-                <a:cs typeface="JetBrains Mono" panose="02000009000000000000" pitchFamily="49" charset="0"/>
-              </a:rPr>
-              <a:t>]</a:t>
+              <a:t>		"chunk_ids": [	50962, 101542, 32657… ]</a:t>
             </a:r>
           </a:p>
           <a:p>
